--- a/document/TCS_Agentic_AI_Hackathon_Presentation.pptx
+++ b/document/TCS_Agentic_AI_Hackathon_Presentation.pptx
@@ -2756,7 +2756,7 @@
         <p:spPr>
           <a:xfrm>
             <a:off x="548640" y="2468880"/>
-            <a:ext cx="3200400" cy="548640"/>
+            <a:ext cx="3200400" cy="640080"/>
           </a:xfrm>
           <a:prstGeom prst="rect">
             <a:avLst/>
@@ -2780,7 +2780,7 @@
                 <a:ea typeface="Calibri" pitchFamily="34" charset="-122"/>
                 <a:cs typeface="Calibri" pitchFamily="34" charset="-120"/>
               </a:rPr>
-              <a:t>Ask in plain English — "Why is my pod crashing?"</a:t>
+              <a:t>Ask in plain English — "Why is my pod crashing?"  No kubectl commands needed.</a:t>
             </a:r>
             <a:endParaRPr lang="en-US" sz="1200" dirty="0"/>
           </a:p>
@@ -2899,7 +2899,7 @@
         <p:spPr>
           <a:xfrm>
             <a:off x="4389120" y="2468880"/>
-            <a:ext cx="3200400" cy="548640"/>
+            <a:ext cx="3200400" cy="640080"/>
           </a:xfrm>
           <a:prstGeom prst="rect">
             <a:avLst/>
@@ -2923,7 +2923,7 @@
                 <a:ea typeface="Calibri" pitchFamily="34" charset="-122"/>
                 <a:cs typeface="Calibri" pitchFamily="34" charset="-120"/>
               </a:rPr>
-              <a:t>Collects logs, events, metrics automatically</a:t>
+              <a:t>Collects logs, events, metrics from cluster automatically in seconds.</a:t>
             </a:r>
             <a:endParaRPr lang="en-US" sz="1200" dirty="0"/>
           </a:p>
@@ -3042,7 +3042,7 @@
         <p:spPr>
           <a:xfrm>
             <a:off x="8229600" y="2468880"/>
-            <a:ext cx="3200400" cy="548640"/>
+            <a:ext cx="3200400" cy="640080"/>
           </a:xfrm>
           <a:prstGeom prst="rect">
             <a:avLst/>
@@ -3066,7 +3066,7 @@
                 <a:ea typeface="Calibri" pitchFamily="34" charset="-122"/>
                 <a:cs typeface="Calibri" pitchFamily="34" charset="-120"/>
               </a:rPr>
-              <a:t>Rule-based + LLM root cause analysis</a:t>
+              <a:t>Rule-based pattern matching + LLM contextual root cause analysis.</a:t>
             </a:r>
             <a:endParaRPr lang="en-US" sz="1200" dirty="0"/>
           </a:p>
@@ -3185,7 +3185,7 @@
         <p:spPr>
           <a:xfrm>
             <a:off x="548640" y="4846320"/>
-            <a:ext cx="3200400" cy="548640"/>
+            <a:ext cx="3200400" cy="640080"/>
           </a:xfrm>
           <a:prstGeom prst="rect">
             <a:avLst/>
@@ -3209,7 +3209,7 @@
                 <a:ea typeface="Calibri" pitchFamily="34" charset="-122"/>
                 <a:cs typeface="Calibri" pitchFamily="34" charset="-120"/>
               </a:rPr>
-              <a:t>Data-driven remediation with risk assessment</a:t>
+              <a:t>Data-driven remediation with restart-aware scaling and risk assessment.</a:t>
             </a:r>
             <a:endParaRPr lang="en-US" sz="1200" dirty="0"/>
           </a:p>
@@ -3328,7 +3328,7 @@
         <p:spPr>
           <a:xfrm>
             <a:off x="4389120" y="4846320"/>
-            <a:ext cx="3200400" cy="548640"/>
+            <a:ext cx="3200400" cy="640080"/>
           </a:xfrm>
           <a:prstGeom prst="rect">
             <a:avLst/>
@@ -3352,7 +3352,7 @@
                 <a:ea typeface="Calibri" pitchFamily="34" charset="-122"/>
                 <a:cs typeface="Calibri" pitchFamily="34" charset="-120"/>
               </a:rPr>
-              <a:t>Auto-create, update, and close incidents</a:t>
+              <a:t>Auto-create incidents, populate fields, update work notes, close on resolution.</a:t>
             </a:r>
             <a:endParaRPr lang="en-US" sz="1200" dirty="0"/>
           </a:p>
@@ -3471,7 +3471,7 @@
         <p:spPr>
           <a:xfrm>
             <a:off x="8229600" y="4846320"/>
-            <a:ext cx="3200400" cy="548640"/>
+            <a:ext cx="3200400" cy="640080"/>
           </a:xfrm>
           <a:prstGeom prst="rect">
             <a:avLst/>
@@ -3495,7 +3495,7 @@
                 <a:ea typeface="Calibri" pitchFamily="34" charset="-122"/>
                 <a:cs typeface="Calibri" pitchFamily="34" charset="-120"/>
               </a:rPr>
-              <a:t>Full metrics comparison + incident timeline</a:t>
+              <a:t>Full metrics comparison + incident timeline with MTTR calculation.</a:t>
             </a:r>
             <a:endParaRPr lang="en-US" sz="1200" dirty="0"/>
           </a:p>
@@ -3622,8 +3622,8 @@
         </p:nvSpPr>
         <p:spPr>
           <a:xfrm>
-            <a:off x="548640" y="182880"/>
-            <a:ext cx="10972800" cy="548640"/>
+            <a:off x="457200" y="137160"/>
+            <a:ext cx="4572000" cy="502920"/>
           </a:xfrm>
           <a:prstGeom prst="rect">
             <a:avLst/>
@@ -3639,7 +3639,7 @@
               <a:buNone/>
             </a:pPr>
             <a:r>
-              <a:rPr lang="en-US" sz="2800" b="1" dirty="0">
+              <a:rPr lang="en-US" sz="2600" b="1" dirty="0">
                 <a:solidFill>
                   <a:srgbClr val="0F172A"/>
                 </a:solidFill>
@@ -3649,7 +3649,7 @@
               </a:rPr>
               <a:t>End-to-End Workflow</a:t>
             </a:r>
-            <a:endParaRPr lang="en-US" sz="2800" dirty="0"/>
+            <a:endParaRPr lang="en-US" sz="2600" dirty="0"/>
           </a:p>
         </p:txBody>
       </p:sp>
@@ -3661,12 +3661,12 @@
         </p:nvSpPr>
         <p:spPr>
           <a:xfrm>
-            <a:off x="5029200" y="320040"/>
-            <a:ext cx="182880" cy="182880"/>
+            <a:off x="5303520" y="274320"/>
+            <a:ext cx="201168" cy="201168"/>
           </a:xfrm>
           <a:prstGeom prst="rect">
             <a:avLst>
-              <a:gd name="adj" fmla="val 15000"/>
+              <a:gd name="adj" fmla="val 18182"/>
             </a:avLst>
           </a:prstGeom>
           <a:solidFill>
@@ -3683,8 +3683,8 @@
         </p:nvSpPr>
         <p:spPr>
           <a:xfrm>
-            <a:off x="5257800" y="274320"/>
-            <a:ext cx="1371600" cy="274320"/>
+            <a:off x="5559552" y="219456"/>
+            <a:ext cx="1371600" cy="320040"/>
           </a:xfrm>
           <a:prstGeom prst="rect">
             <a:avLst/>
@@ -3722,12 +3722,12 @@
         </p:nvSpPr>
         <p:spPr>
           <a:xfrm>
-            <a:off x="6858000" y="320040"/>
-            <a:ext cx="182880" cy="182880"/>
+            <a:off x="7132320" y="274320"/>
+            <a:ext cx="201168" cy="201168"/>
           </a:xfrm>
           <a:prstGeom prst="rect">
             <a:avLst>
-              <a:gd name="adj" fmla="val 15000"/>
+              <a:gd name="adj" fmla="val 18182"/>
             </a:avLst>
           </a:prstGeom>
           <a:solidFill>
@@ -3744,8 +3744,8 @@
         </p:nvSpPr>
         <p:spPr>
           <a:xfrm>
-            <a:off x="7086600" y="274320"/>
-            <a:ext cx="1371600" cy="274320"/>
+            <a:off x="7388352" y="219456"/>
+            <a:ext cx="1371600" cy="320040"/>
           </a:xfrm>
           <a:prstGeom prst="rect">
             <a:avLst/>
@@ -3783,12 +3783,12 @@
         </p:nvSpPr>
         <p:spPr>
           <a:xfrm>
-            <a:off x="8686800" y="320040"/>
-            <a:ext cx="182880" cy="182880"/>
+            <a:off x="8778240" y="274320"/>
+            <a:ext cx="201168" cy="201168"/>
           </a:xfrm>
           <a:prstGeom prst="rect">
             <a:avLst>
-              <a:gd name="adj" fmla="val 15000"/>
+              <a:gd name="adj" fmla="val 18182"/>
             </a:avLst>
           </a:prstGeom>
           <a:solidFill>
@@ -3805,8 +3805,8 @@
         </p:nvSpPr>
         <p:spPr>
           <a:xfrm>
-            <a:off x="8915400" y="274320"/>
-            <a:ext cx="1371600" cy="274320"/>
+            <a:off x="9034272" y="219456"/>
+            <a:ext cx="1371600" cy="320040"/>
           </a:xfrm>
           <a:prstGeom prst="rect">
             <a:avLst/>
@@ -3844,12 +3844,12 @@
         </p:nvSpPr>
         <p:spPr>
           <a:xfrm>
-            <a:off x="10332720" y="320040"/>
-            <a:ext cx="182880" cy="182880"/>
+            <a:off x="10424160" y="274320"/>
+            <a:ext cx="201168" cy="201168"/>
           </a:xfrm>
           <a:prstGeom prst="rect">
             <a:avLst>
-              <a:gd name="adj" fmla="val 15000"/>
+              <a:gd name="adj" fmla="val 18182"/>
             </a:avLst>
           </a:prstGeom>
           <a:solidFill>
@@ -3866,8 +3866,8 @@
         </p:nvSpPr>
         <p:spPr>
           <a:xfrm>
-            <a:off x="10561320" y="274320"/>
-            <a:ext cx="1371600" cy="274320"/>
+            <a:off x="10680192" y="219456"/>
+            <a:ext cx="1371600" cy="320040"/>
           </a:xfrm>
           <a:prstGeom prst="rect">
             <a:avLst/>
@@ -3905,18 +3905,79 @@
         </p:nvSpPr>
         <p:spPr>
           <a:xfrm>
-            <a:off x="274320" y="1005840"/>
-            <a:ext cx="2468880" cy="1371600"/>
+            <a:off x="182880" y="667512"/>
+            <a:ext cx="11795760" cy="274320"/>
           </a:xfrm>
           <a:prstGeom prst="rect">
             <a:avLst>
-              <a:gd name="adj" fmla="val 6667"/>
+              <a:gd name="adj" fmla="val 13333"/>
             </a:avLst>
           </a:prstGeom>
           <a:solidFill>
+            <a:srgbClr val="F1F5F9"/>
+          </a:solidFill>
+          <a:ln/>
+        </p:spPr>
+      </p:sp>
+      <p:sp>
+        <p:nvSpPr>
+          <p:cNvPr id="13" name="Text 11"/>
+          <p:cNvSpPr/>
+          <p:nvPr/>
+        </p:nvSpPr>
+        <p:spPr>
+          <a:xfrm>
+            <a:off x="320040" y="667512"/>
+            <a:ext cx="10972800" cy="274320"/>
+          </a:xfrm>
+          <a:prstGeom prst="rect">
+            <a:avLst/>
+          </a:prstGeom>
+          <a:noFill/>
+          <a:ln/>
+        </p:spPr>
+        <p:txBody>
+          <a:bodyPr wrap="square" rtlCol="0" anchor="ctr"/>
+          <a:lstStyle/>
+          <a:p>
+            <a:pPr indent="0" marL="0">
+              <a:buNone/>
+            </a:pPr>
+            <a:r>
+              <a:rPr lang="en-US" sz="900" b="1" dirty="0">
+                <a:solidFill>
+                  <a:srgbClr val="94A3B8"/>
+                </a:solidFill>
+                <a:latin typeface="Calibri" pitchFamily="34" charset="0"/>
+                <a:ea typeface="Calibri" pitchFamily="34" charset="-122"/>
+                <a:cs typeface="Calibri" pitchFamily="34" charset="-120"/>
+              </a:rPr>
+              <a:t>PHASE 1 — DETECTION &amp; ANALYSIS</a:t>
+            </a:r>
+            <a:endParaRPr lang="en-US" sz="900" dirty="0"/>
+          </a:p>
+        </p:txBody>
+      </p:sp>
+      <p:sp>
+        <p:nvSpPr>
+          <p:cNvPr id="14" name="Shape 12"/>
+          <p:cNvSpPr/>
+          <p:nvPr/>
+        </p:nvSpPr>
+        <p:spPr>
+          <a:xfrm>
+            <a:off x="182880" y="960120"/>
+            <a:ext cx="2560320" cy="1417320"/>
+          </a:xfrm>
+          <a:prstGeom prst="rect">
+            <a:avLst>
+              <a:gd name="adj" fmla="val 6452"/>
+            </a:avLst>
+          </a:prstGeom>
+          <a:solidFill>
             <a:srgbClr val="FEF3C7"/>
           </a:solidFill>
-          <a:ln w="19050">
+          <a:ln w="22860">
             <a:solidFill>
               <a:srgbClr val="D97706"/>
             </a:solidFill>
@@ -3926,14 +3987,14 @@
       </p:sp>
       <p:sp>
         <p:nvSpPr>
-          <p:cNvPr id="13" name="Shape 11"/>
-          <p:cNvSpPr/>
-          <p:nvPr/>
-        </p:nvSpPr>
-        <p:spPr>
-          <a:xfrm>
-            <a:off x="347472" y="1078992"/>
-            <a:ext cx="292608" cy="292608"/>
+          <p:cNvPr id="15" name="Shape 13"/>
+          <p:cNvSpPr/>
+          <p:nvPr/>
+        </p:nvSpPr>
+        <p:spPr>
+          <a:xfrm>
+            <a:off x="274320" y="1051560"/>
+            <a:ext cx="274320" cy="274320"/>
           </a:xfrm>
           <a:prstGeom prst="ellipse">
             <a:avLst/>
@@ -3946,14 +4007,14 @@
       </p:sp>
       <p:sp>
         <p:nvSpPr>
-          <p:cNvPr id="14" name="Text 12"/>
-          <p:cNvSpPr/>
-          <p:nvPr/>
-        </p:nvSpPr>
-        <p:spPr>
-          <a:xfrm>
-            <a:off x="347472" y="1078992"/>
-            <a:ext cx="292608" cy="292608"/>
+          <p:cNvPr id="16" name="Text 14"/>
+          <p:cNvSpPr/>
+          <p:nvPr/>
+        </p:nvSpPr>
+        <p:spPr>
+          <a:xfrm>
+            <a:off x="274320" y="1051560"/>
+            <a:ext cx="274320" cy="274320"/>
           </a:xfrm>
           <a:prstGeom prst="rect">
             <a:avLst/>
@@ -3969,7 +4030,7 @@
               <a:buNone/>
             </a:pPr>
             <a:r>
-              <a:rPr lang="en-US" sz="1000" b="1" dirty="0">
+              <a:rPr lang="en-US" sz="1100" b="1" dirty="0">
                 <a:solidFill>
                   <a:srgbClr val="FFFFFF"/>
                 </a:solidFill>
@@ -3979,20 +4040,20 @@
               </a:rPr>
               <a:t>1</a:t>
             </a:r>
-            <a:endParaRPr lang="en-US" sz="1000" dirty="0"/>
-          </a:p>
-        </p:txBody>
-      </p:sp>
-      <p:sp>
-        <p:nvSpPr>
-          <p:cNvPr id="15" name="Text 13"/>
-          <p:cNvSpPr/>
-          <p:nvPr/>
-        </p:nvSpPr>
-        <p:spPr>
-          <a:xfrm>
-            <a:off x="685800" y="1060704"/>
-            <a:ext cx="1965960" cy="320040"/>
+            <a:endParaRPr lang="en-US" sz="1100" dirty="0"/>
+          </a:p>
+        </p:txBody>
+      </p:sp>
+      <p:sp>
+        <p:nvSpPr>
+          <p:cNvPr id="17" name="Text 15"/>
+          <p:cNvSpPr/>
+          <p:nvPr/>
+        </p:nvSpPr>
+        <p:spPr>
+          <a:xfrm>
+            <a:off x="621792" y="1033272"/>
+            <a:ext cx="2029968" cy="292608"/>
           </a:xfrm>
           <a:prstGeom prst="rect">
             <a:avLst/>
@@ -4010,7 +4071,7 @@
             <a:r>
               <a:rPr lang="en-US" sz="1100" b="1" dirty="0">
                 <a:solidFill>
-                  <a:srgbClr val="D97706"/>
+                  <a:srgbClr val="92400E"/>
                 </a:solidFill>
                 <a:latin typeface="Calibri" pitchFamily="34" charset="0"/>
                 <a:ea typeface="Calibri" pitchFamily="34" charset="-122"/>
@@ -4024,14 +4085,14 @@
       </p:sp>
       <p:sp>
         <p:nvSpPr>
-          <p:cNvPr id="16" name="Text 14"/>
-          <p:cNvSpPr/>
-          <p:nvPr/>
-        </p:nvSpPr>
-        <p:spPr>
-          <a:xfrm>
-            <a:off x="384048" y="1389888"/>
-            <a:ext cx="2249424" cy="914400"/>
+          <p:cNvPr id="18" name="Text 16"/>
+          <p:cNvSpPr/>
+          <p:nvPr/>
+        </p:nvSpPr>
+        <p:spPr>
+          <a:xfrm>
+            <a:off x="292608" y="1362456"/>
+            <a:ext cx="2340864" cy="941832"/>
           </a:xfrm>
           <a:prstGeom prst="rect">
             <a:avLst/>
@@ -4045,7 +4106,7 @@
           <a:p>
             <a:pPr indent="0" marL="0">
               <a:lnSpc>
-                <a:spcPct val="115000"/>
+                <a:spcPct val="120000"/>
               </a:lnSpc>
               <a:buNone/>
             </a:pPr>
@@ -4065,7 +4126,7 @@
           <a:p>
             <a:pPr indent="0" marL="0">
               <a:lnSpc>
-                <a:spcPct val="115000"/>
+                <a:spcPct val="120000"/>
               </a:lnSpc>
               <a:buNone/>
             </a:pPr>
@@ -4085,7 +4146,7 @@
           <a:p>
             <a:pPr indent="0" marL="0">
               <a:lnSpc>
-                <a:spcPct val="115000"/>
+                <a:spcPct val="120000"/>
               </a:lnSpc>
               <a:buNone/>
             </a:pPr>
@@ -4094,7 +4155,7 @@
           <a:p>
             <a:pPr indent="0" marL="0">
               <a:lnSpc>
-                <a:spcPct val="115000"/>
+                <a:spcPct val="120000"/>
               </a:lnSpc>
               <a:buNone/>
             </a:pPr>
@@ -4107,52 +4168,32 @@
                 <a:ea typeface="Calibri" pitchFamily="34" charset="-122"/>
                 <a:cs typeface="Calibri" pitchFamily="34" charset="-120"/>
               </a:rPr>
-              <a:t>Natural language input</a:t>
+              <a:t>Natural language in AI Chat</a:t>
             </a:r>
             <a:endParaRPr lang="en-US" sz="850" dirty="0"/>
           </a:p>
-          <a:p>
-            <a:pPr indent="0" marL="0">
-              <a:lnSpc>
-                <a:spcPct val="115000"/>
-              </a:lnSpc>
-              <a:buNone/>
-            </a:pPr>
-            <a:r>
-              <a:rPr lang="en-US" sz="850" dirty="0">
-                <a:solidFill>
-                  <a:srgbClr val="475569"/>
-                </a:solidFill>
-                <a:latin typeface="Calibri" pitchFamily="34" charset="0"/>
-                <a:ea typeface="Calibri" pitchFamily="34" charset="-122"/>
-                <a:cs typeface="Calibri" pitchFamily="34" charset="-120"/>
-              </a:rPr>
-              <a:t>in AI Chat</a:t>
-            </a:r>
-            <a:endParaRPr lang="en-US" sz="850" dirty="0"/>
-          </a:p>
-        </p:txBody>
-      </p:sp>
-      <p:sp>
-        <p:nvSpPr>
-          <p:cNvPr id="17" name="Shape 15"/>
-          <p:cNvSpPr/>
-          <p:nvPr/>
-        </p:nvSpPr>
-        <p:spPr>
-          <a:xfrm>
-            <a:off x="3017520" y="1005840"/>
-            <a:ext cx="2468880" cy="1371600"/>
+        </p:txBody>
+      </p:sp>
+      <p:sp>
+        <p:nvSpPr>
+          <p:cNvPr id="19" name="Shape 17"/>
+          <p:cNvSpPr/>
+          <p:nvPr/>
+        </p:nvSpPr>
+        <p:spPr>
+          <a:xfrm>
+            <a:off x="3154680" y="960120"/>
+            <a:ext cx="2560320" cy="1417320"/>
           </a:xfrm>
           <a:prstGeom prst="rect">
             <a:avLst>
-              <a:gd name="adj" fmla="val 6667"/>
+              <a:gd name="adj" fmla="val 6452"/>
             </a:avLst>
           </a:prstGeom>
           <a:solidFill>
             <a:srgbClr val="EDE9FE"/>
           </a:solidFill>
-          <a:ln w="19050">
+          <a:ln w="22860">
             <a:solidFill>
               <a:srgbClr val="7C3AED"/>
             </a:solidFill>
@@ -4162,14 +4203,14 @@
       </p:sp>
       <p:sp>
         <p:nvSpPr>
-          <p:cNvPr id="18" name="Shape 16"/>
-          <p:cNvSpPr/>
-          <p:nvPr/>
-        </p:nvSpPr>
-        <p:spPr>
-          <a:xfrm>
-            <a:off x="3090672" y="1078992"/>
-            <a:ext cx="292608" cy="292608"/>
+          <p:cNvPr id="20" name="Shape 18"/>
+          <p:cNvSpPr/>
+          <p:nvPr/>
+        </p:nvSpPr>
+        <p:spPr>
+          <a:xfrm>
+            <a:off x="3246120" y="1051560"/>
+            <a:ext cx="274320" cy="274320"/>
           </a:xfrm>
           <a:prstGeom prst="ellipse">
             <a:avLst/>
@@ -4182,14 +4223,14 @@
       </p:sp>
       <p:sp>
         <p:nvSpPr>
-          <p:cNvPr id="19" name="Text 17"/>
-          <p:cNvSpPr/>
-          <p:nvPr/>
-        </p:nvSpPr>
-        <p:spPr>
-          <a:xfrm>
-            <a:off x="3090672" y="1078992"/>
-            <a:ext cx="292608" cy="292608"/>
+          <p:cNvPr id="21" name="Text 19"/>
+          <p:cNvSpPr/>
+          <p:nvPr/>
+        </p:nvSpPr>
+        <p:spPr>
+          <a:xfrm>
+            <a:off x="3246120" y="1051560"/>
+            <a:ext cx="274320" cy="274320"/>
           </a:xfrm>
           <a:prstGeom prst="rect">
             <a:avLst/>
@@ -4205,7 +4246,7 @@
               <a:buNone/>
             </a:pPr>
             <a:r>
-              <a:rPr lang="en-US" sz="1000" b="1" dirty="0">
+              <a:rPr lang="en-US" sz="1100" b="1" dirty="0">
                 <a:solidFill>
                   <a:srgbClr val="FFFFFF"/>
                 </a:solidFill>
@@ -4215,20 +4256,20 @@
               </a:rPr>
               <a:t>2</a:t>
             </a:r>
-            <a:endParaRPr lang="en-US" sz="1000" dirty="0"/>
-          </a:p>
-        </p:txBody>
-      </p:sp>
-      <p:sp>
-        <p:nvSpPr>
-          <p:cNvPr id="20" name="Text 18"/>
-          <p:cNvSpPr/>
-          <p:nvPr/>
-        </p:nvSpPr>
-        <p:spPr>
-          <a:xfrm>
-            <a:off x="3429000" y="1060704"/>
-            <a:ext cx="1965960" cy="320040"/>
+            <a:endParaRPr lang="en-US" sz="1100" dirty="0"/>
+          </a:p>
+        </p:txBody>
+      </p:sp>
+      <p:sp>
+        <p:nvSpPr>
+          <p:cNvPr id="22" name="Text 20"/>
+          <p:cNvSpPr/>
+          <p:nvPr/>
+        </p:nvSpPr>
+        <p:spPr>
+          <a:xfrm>
+            <a:off x="3593592" y="1033272"/>
+            <a:ext cx="2029968" cy="292608"/>
           </a:xfrm>
           <a:prstGeom prst="rect">
             <a:avLst/>
@@ -4246,7 +4287,7 @@
             <a:r>
               <a:rPr lang="en-US" sz="1100" b="1" dirty="0">
                 <a:solidFill>
-                  <a:srgbClr val="7C3AED"/>
+                  <a:srgbClr val="5B21B6"/>
                 </a:solidFill>
                 <a:latin typeface="Calibri" pitchFamily="34" charset="0"/>
                 <a:ea typeface="Calibri" pitchFamily="34" charset="-122"/>
@@ -4260,14 +4301,14 @@
       </p:sp>
       <p:sp>
         <p:nvSpPr>
-          <p:cNvPr id="21" name="Text 19"/>
-          <p:cNvSpPr/>
-          <p:nvPr/>
-        </p:nvSpPr>
-        <p:spPr>
-          <a:xfrm>
-            <a:off x="3127248" y="1389888"/>
-            <a:ext cx="2249424" cy="914400"/>
+          <p:cNvPr id="23" name="Text 21"/>
+          <p:cNvSpPr/>
+          <p:nvPr/>
+        </p:nvSpPr>
+        <p:spPr>
+          <a:xfrm>
+            <a:off x="3264408" y="1362456"/>
+            <a:ext cx="2340864" cy="941832"/>
           </a:xfrm>
           <a:prstGeom prst="rect">
             <a:avLst/>
@@ -4281,7 +4322,7 @@
           <a:p>
             <a:pPr indent="0" marL="0">
               <a:lnSpc>
-                <a:spcPct val="115000"/>
+                <a:spcPct val="120000"/>
               </a:lnSpc>
               <a:buNone/>
             </a:pPr>
@@ -4301,7 +4342,7 @@
           <a:p>
             <a:pPr indent="0" marL="0">
               <a:lnSpc>
-                <a:spcPct val="115000"/>
+                <a:spcPct val="120000"/>
               </a:lnSpc>
               <a:buNone/>
             </a:pPr>
@@ -4321,7 +4362,7 @@
           <a:p>
             <a:pPr indent="0" marL="0">
               <a:lnSpc>
-                <a:spcPct val="115000"/>
+                <a:spcPct val="120000"/>
               </a:lnSpc>
               <a:buNone/>
             </a:pPr>
@@ -4341,7 +4382,7 @@
           <a:p>
             <a:pPr indent="0" marL="0">
               <a:lnSpc>
-                <a:spcPct val="115000"/>
+                <a:spcPct val="120000"/>
               </a:lnSpc>
               <a:buNone/>
             </a:pPr>
@@ -4362,24 +4403,24 @@
       </p:sp>
       <p:sp>
         <p:nvSpPr>
-          <p:cNvPr id="22" name="Shape 20"/>
-          <p:cNvSpPr/>
-          <p:nvPr/>
-        </p:nvSpPr>
-        <p:spPr>
-          <a:xfrm>
-            <a:off x="5760720" y="1005840"/>
-            <a:ext cx="2011680" cy="1371600"/>
+          <p:cNvPr id="24" name="Shape 22"/>
+          <p:cNvSpPr/>
+          <p:nvPr/>
+        </p:nvSpPr>
+        <p:spPr>
+          <a:xfrm>
+            <a:off x="6126480" y="960120"/>
+            <a:ext cx="2286000" cy="1417320"/>
           </a:xfrm>
           <a:prstGeom prst="rect">
             <a:avLst>
-              <a:gd name="adj" fmla="val 6667"/>
+              <a:gd name="adj" fmla="val 6452"/>
             </a:avLst>
           </a:prstGeom>
           <a:solidFill>
             <a:srgbClr val="D1FAE5"/>
           </a:solidFill>
-          <a:ln w="19050">
+          <a:ln w="22860">
             <a:solidFill>
               <a:srgbClr val="059669"/>
             </a:solidFill>
@@ -4389,14 +4430,14 @@
       </p:sp>
       <p:sp>
         <p:nvSpPr>
-          <p:cNvPr id="23" name="Shape 21"/>
-          <p:cNvSpPr/>
-          <p:nvPr/>
-        </p:nvSpPr>
-        <p:spPr>
-          <a:xfrm>
-            <a:off x="5833872" y="1078992"/>
-            <a:ext cx="292608" cy="292608"/>
+          <p:cNvPr id="25" name="Shape 23"/>
+          <p:cNvSpPr/>
+          <p:nvPr/>
+        </p:nvSpPr>
+        <p:spPr>
+          <a:xfrm>
+            <a:off x="6217920" y="1051560"/>
+            <a:ext cx="274320" cy="274320"/>
           </a:xfrm>
           <a:prstGeom prst="ellipse">
             <a:avLst/>
@@ -4409,14 +4450,14 @@
       </p:sp>
       <p:sp>
         <p:nvSpPr>
-          <p:cNvPr id="24" name="Text 22"/>
-          <p:cNvSpPr/>
-          <p:nvPr/>
-        </p:nvSpPr>
-        <p:spPr>
-          <a:xfrm>
-            <a:off x="5833872" y="1078992"/>
-            <a:ext cx="292608" cy="292608"/>
+          <p:cNvPr id="26" name="Text 24"/>
+          <p:cNvSpPr/>
+          <p:nvPr/>
+        </p:nvSpPr>
+        <p:spPr>
+          <a:xfrm>
+            <a:off x="6217920" y="1051560"/>
+            <a:ext cx="274320" cy="274320"/>
           </a:xfrm>
           <a:prstGeom prst="rect">
             <a:avLst/>
@@ -4432,7 +4473,7 @@
               <a:buNone/>
             </a:pPr>
             <a:r>
-              <a:rPr lang="en-US" sz="1000" b="1" dirty="0">
+              <a:rPr lang="en-US" sz="1100" b="1" dirty="0">
                 <a:solidFill>
                   <a:srgbClr val="FFFFFF"/>
                 </a:solidFill>
@@ -4442,20 +4483,20 @@
               </a:rPr>
               <a:t>3</a:t>
             </a:r>
-            <a:endParaRPr lang="en-US" sz="1000" dirty="0"/>
-          </a:p>
-        </p:txBody>
-      </p:sp>
-      <p:sp>
-        <p:nvSpPr>
-          <p:cNvPr id="25" name="Text 23"/>
-          <p:cNvSpPr/>
-          <p:nvPr/>
-        </p:nvSpPr>
-        <p:spPr>
-          <a:xfrm>
-            <a:off x="6172200" y="1060704"/>
-            <a:ext cx="1508760" cy="320040"/>
+            <a:endParaRPr lang="en-US" sz="1100" dirty="0"/>
+          </a:p>
+        </p:txBody>
+      </p:sp>
+      <p:sp>
+        <p:nvSpPr>
+          <p:cNvPr id="27" name="Text 25"/>
+          <p:cNvSpPr/>
+          <p:nvPr/>
+        </p:nvSpPr>
+        <p:spPr>
+          <a:xfrm>
+            <a:off x="6565392" y="1033272"/>
+            <a:ext cx="1755648" cy="292608"/>
           </a:xfrm>
           <a:prstGeom prst="rect">
             <a:avLst/>
@@ -4473,7 +4514,7 @@
             <a:r>
               <a:rPr lang="en-US" sz="1100" b="1" dirty="0">
                 <a:solidFill>
-                  <a:srgbClr val="059669"/>
+                  <a:srgbClr val="065F46"/>
                 </a:solidFill>
                 <a:latin typeface="Calibri" pitchFamily="34" charset="0"/>
                 <a:ea typeface="Calibri" pitchFamily="34" charset="-122"/>
@@ -4487,14 +4528,14 @@
       </p:sp>
       <p:sp>
         <p:nvSpPr>
-          <p:cNvPr id="26" name="Text 24"/>
-          <p:cNvSpPr/>
-          <p:nvPr/>
-        </p:nvSpPr>
-        <p:spPr>
-          <a:xfrm>
-            <a:off x="5870448" y="1389888"/>
-            <a:ext cx="1792224" cy="914400"/>
+          <p:cNvPr id="28" name="Text 26"/>
+          <p:cNvSpPr/>
+          <p:nvPr/>
+        </p:nvSpPr>
+        <p:spPr>
+          <a:xfrm>
+            <a:off x="6236208" y="1362456"/>
+            <a:ext cx="2066544" cy="941832"/>
           </a:xfrm>
           <a:prstGeom prst="rect">
             <a:avLst/>
@@ -4508,7 +4549,7 @@
           <a:p>
             <a:pPr indent="0" marL="0">
               <a:lnSpc>
-                <a:spcPct val="115000"/>
+                <a:spcPct val="120000"/>
               </a:lnSpc>
               <a:buNone/>
             </a:pPr>
@@ -4528,7 +4569,7 @@
           <a:p>
             <a:pPr indent="0" marL="0">
               <a:lnSpc>
-                <a:spcPct val="115000"/>
+                <a:spcPct val="120000"/>
               </a:lnSpc>
               <a:buNone/>
             </a:pPr>
@@ -4548,7 +4589,7 @@
           <a:p>
             <a:pPr indent="0" marL="0">
               <a:lnSpc>
-                <a:spcPct val="115000"/>
+                <a:spcPct val="120000"/>
               </a:lnSpc>
               <a:buNone/>
             </a:pPr>
@@ -4568,7 +4609,7 @@
           <a:p>
             <a:pPr indent="0" marL="0">
               <a:lnSpc>
-                <a:spcPct val="115000"/>
+                <a:spcPct val="120000"/>
               </a:lnSpc>
               <a:buNone/>
             </a:pPr>
@@ -4589,24 +4630,24 @@
       </p:sp>
       <p:sp>
         <p:nvSpPr>
-          <p:cNvPr id="27" name="Shape 25"/>
-          <p:cNvSpPr/>
-          <p:nvPr/>
-        </p:nvSpPr>
-        <p:spPr>
-          <a:xfrm>
-            <a:off x="8046720" y="1005840"/>
-            <a:ext cx="3566160" cy="1371600"/>
+          <p:cNvPr id="29" name="Shape 27"/>
+          <p:cNvSpPr/>
+          <p:nvPr/>
+        </p:nvSpPr>
+        <p:spPr>
+          <a:xfrm>
+            <a:off x="8823960" y="960120"/>
+            <a:ext cx="3154680" cy="1417320"/>
           </a:xfrm>
           <a:prstGeom prst="rect">
             <a:avLst>
-              <a:gd name="adj" fmla="val 6667"/>
+              <a:gd name="adj" fmla="val 6452"/>
             </a:avLst>
           </a:prstGeom>
           <a:solidFill>
             <a:srgbClr val="D1FAE5"/>
           </a:solidFill>
-          <a:ln w="19050">
+          <a:ln w="22860">
             <a:solidFill>
               <a:srgbClr val="059669"/>
             </a:solidFill>
@@ -4616,14 +4657,14 @@
       </p:sp>
       <p:sp>
         <p:nvSpPr>
-          <p:cNvPr id="28" name="Shape 26"/>
-          <p:cNvSpPr/>
-          <p:nvPr/>
-        </p:nvSpPr>
-        <p:spPr>
-          <a:xfrm>
-            <a:off x="8119872" y="1078992"/>
-            <a:ext cx="292608" cy="292608"/>
+          <p:cNvPr id="30" name="Shape 28"/>
+          <p:cNvSpPr/>
+          <p:nvPr/>
+        </p:nvSpPr>
+        <p:spPr>
+          <a:xfrm>
+            <a:off x="8915400" y="1051560"/>
+            <a:ext cx="274320" cy="274320"/>
           </a:xfrm>
           <a:prstGeom prst="ellipse">
             <a:avLst/>
@@ -4636,14 +4677,14 @@
       </p:sp>
       <p:sp>
         <p:nvSpPr>
-          <p:cNvPr id="29" name="Text 27"/>
-          <p:cNvSpPr/>
-          <p:nvPr/>
-        </p:nvSpPr>
-        <p:spPr>
-          <a:xfrm>
-            <a:off x="8119872" y="1078992"/>
-            <a:ext cx="292608" cy="292608"/>
+          <p:cNvPr id="31" name="Text 29"/>
+          <p:cNvSpPr/>
+          <p:nvPr/>
+        </p:nvSpPr>
+        <p:spPr>
+          <a:xfrm>
+            <a:off x="8915400" y="1051560"/>
+            <a:ext cx="274320" cy="274320"/>
           </a:xfrm>
           <a:prstGeom prst="rect">
             <a:avLst/>
@@ -4659,7 +4700,7 @@
               <a:buNone/>
             </a:pPr>
             <a:r>
-              <a:rPr lang="en-US" sz="1000" b="1" dirty="0">
+              <a:rPr lang="en-US" sz="1100" b="1" dirty="0">
                 <a:solidFill>
                   <a:srgbClr val="FFFFFF"/>
                 </a:solidFill>
@@ -4669,20 +4710,20 @@
               </a:rPr>
               <a:t>4</a:t>
             </a:r>
-            <a:endParaRPr lang="en-US" sz="1000" dirty="0"/>
-          </a:p>
-        </p:txBody>
-      </p:sp>
-      <p:sp>
-        <p:nvSpPr>
-          <p:cNvPr id="30" name="Text 28"/>
-          <p:cNvSpPr/>
-          <p:nvPr/>
-        </p:nvSpPr>
-        <p:spPr>
-          <a:xfrm>
-            <a:off x="8458200" y="1060704"/>
-            <a:ext cx="3063240" cy="320040"/>
+            <a:endParaRPr lang="en-US" sz="1100" dirty="0"/>
+          </a:p>
+        </p:txBody>
+      </p:sp>
+      <p:sp>
+        <p:nvSpPr>
+          <p:cNvPr id="32" name="Text 30"/>
+          <p:cNvSpPr/>
+          <p:nvPr/>
+        </p:nvSpPr>
+        <p:spPr>
+          <a:xfrm>
+            <a:off x="9262872" y="1033272"/>
+            <a:ext cx="2624328" cy="292608"/>
           </a:xfrm>
           <a:prstGeom prst="rect">
             <a:avLst/>
@@ -4700,7 +4741,7 @@
             <a:r>
               <a:rPr lang="en-US" sz="1100" b="1" dirty="0">
                 <a:solidFill>
-                  <a:srgbClr val="059669"/>
+                  <a:srgbClr val="065F46"/>
                 </a:solidFill>
                 <a:latin typeface="Calibri" pitchFamily="34" charset="0"/>
                 <a:ea typeface="Calibri" pitchFamily="34" charset="-122"/>
@@ -4714,14 +4755,14 @@
       </p:sp>
       <p:sp>
         <p:nvSpPr>
-          <p:cNvPr id="31" name="Text 29"/>
-          <p:cNvSpPr/>
-          <p:nvPr/>
-        </p:nvSpPr>
-        <p:spPr>
-          <a:xfrm>
-            <a:off x="8156448" y="1389888"/>
-            <a:ext cx="3346704" cy="914400"/>
+          <p:cNvPr id="33" name="Text 31"/>
+          <p:cNvSpPr/>
+          <p:nvPr/>
+        </p:nvSpPr>
+        <p:spPr>
+          <a:xfrm>
+            <a:off x="8933688" y="1362456"/>
+            <a:ext cx="2935224" cy="941832"/>
           </a:xfrm>
           <a:prstGeom prst="rect">
             <a:avLst/>
@@ -4735,7 +4776,7 @@
           <a:p>
             <a:pPr indent="0" marL="0">
               <a:lnSpc>
-                <a:spcPct val="115000"/>
+                <a:spcPct val="120000"/>
               </a:lnSpc>
               <a:buNone/>
             </a:pPr>
@@ -4748,14 +4789,14 @@
                 <a:ea typeface="Calibri" pitchFamily="34" charset="-122"/>
                 <a:cs typeface="Calibri" pitchFamily="34" charset="-120"/>
               </a:rPr>
-              <a:t>Logs (200 lines) + Events + Metrics</a:t>
+              <a:t>Logs (200 lines) + Events</a:t>
             </a:r>
             <a:endParaRPr lang="en-US" sz="850" dirty="0"/>
           </a:p>
           <a:p>
             <a:pPr indent="0" marL="0">
               <a:lnSpc>
-                <a:spcPct val="115000"/>
+                <a:spcPct val="120000"/>
               </a:lnSpc>
               <a:buNone/>
             </a:pPr>
@@ -4768,14 +4809,14 @@
                 <a:ea typeface="Calibri" pitchFamily="34" charset="-122"/>
                 <a:cs typeface="Calibri" pitchFamily="34" charset="-120"/>
               </a:rPr>
-              <a:t>Memory: 380Mi / 512Mi | Restarts: 19</a:t>
+              <a:t>+ Metrics</a:t>
             </a:r>
             <a:endParaRPr lang="en-US" sz="850" dirty="0"/>
           </a:p>
           <a:p>
             <a:pPr indent="0" marL="0">
               <a:lnSpc>
-                <a:spcPct val="115000"/>
+                <a:spcPct val="120000"/>
               </a:lnSpc>
               <a:buNone/>
             </a:pPr>
@@ -4788,32 +4829,401 @@
                 <a:ea typeface="Calibri" pitchFamily="34" charset="-122"/>
                 <a:cs typeface="Calibri" pitchFamily="34" charset="-120"/>
               </a:rPr>
-              <a:t>Container State: CrashLoopBackOff</a:t>
+              <a:t>Memory: 380Mi / 512Mi</a:t>
             </a:r>
             <a:endParaRPr lang="en-US" sz="850" dirty="0"/>
           </a:p>
-        </p:txBody>
-      </p:sp>
-      <p:sp>
-        <p:nvSpPr>
-          <p:cNvPr id="32" name="Shape 30"/>
-          <p:cNvSpPr/>
-          <p:nvPr/>
-        </p:nvSpPr>
-        <p:spPr>
-          <a:xfrm>
-            <a:off x="274320" y="2743200"/>
-            <a:ext cx="3017520" cy="1371600"/>
+          <a:p>
+            <a:pPr indent="0" marL="0">
+              <a:lnSpc>
+                <a:spcPct val="120000"/>
+              </a:lnSpc>
+              <a:buNone/>
+            </a:pPr>
+            <a:r>
+              <a:rPr lang="en-US" sz="850" dirty="0">
+                <a:solidFill>
+                  <a:srgbClr val="475569"/>
+                </a:solidFill>
+                <a:latin typeface="Calibri" pitchFamily="34" charset="0"/>
+                <a:ea typeface="Calibri" pitchFamily="34" charset="-122"/>
+                <a:cs typeface="Calibri" pitchFamily="34" charset="-120"/>
+              </a:rPr>
+              <a:t>Restarts: 19 | CrashLoop</a:t>
+            </a:r>
+            <a:endParaRPr lang="en-US" sz="850" dirty="0"/>
+          </a:p>
+        </p:txBody>
+      </p:sp>
+      <p:sp>
+        <p:nvSpPr>
+          <p:cNvPr id="34" name="Shape 32"/>
+          <p:cNvSpPr/>
+          <p:nvPr/>
+        </p:nvSpPr>
+        <p:spPr>
+          <a:xfrm>
+            <a:off x="2761488" y="1632204"/>
+            <a:ext cx="246888" cy="73152"/>
           </a:xfrm>
           <a:prstGeom prst="rect">
             <a:avLst>
-              <a:gd name="adj" fmla="val 6667"/>
+              <a:gd name="adj" fmla="val 25000"/>
             </a:avLst>
           </a:prstGeom>
           <a:solidFill>
+            <a:srgbClr val="64748B"/>
+          </a:solidFill>
+          <a:ln/>
+        </p:spPr>
+      </p:sp>
+      <p:sp>
+        <p:nvSpPr>
+          <p:cNvPr id="35" name="Text 33"/>
+          <p:cNvSpPr/>
+          <p:nvPr/>
+        </p:nvSpPr>
+        <p:spPr>
+          <a:xfrm>
+            <a:off x="2971800" y="1540764"/>
+            <a:ext cx="219456" cy="256032"/>
+          </a:xfrm>
+          <a:prstGeom prst="rect">
+            <a:avLst/>
+          </a:prstGeom>
+          <a:noFill/>
+          <a:ln/>
+        </p:spPr>
+        <p:txBody>
+          <a:bodyPr wrap="square" rtlCol="0" anchor="ctr"/>
+          <a:lstStyle/>
+          <a:p>
+            <a:pPr algn="ctr" indent="0" marL="0">
+              <a:buNone/>
+            </a:pPr>
+            <a:r>
+              <a:rPr lang="en-US" sz="1400" dirty="0">
+                <a:solidFill>
+                  <a:srgbClr val="64748B"/>
+                </a:solidFill>
+                <a:latin typeface="Arial" pitchFamily="34" charset="0"/>
+                <a:ea typeface="Arial" pitchFamily="34" charset="-122"/>
+                <a:cs typeface="Arial" pitchFamily="34" charset="-120"/>
+              </a:rPr>
+              <a:t>▶</a:t>
+            </a:r>
+            <a:endParaRPr lang="en-US" sz="1400" dirty="0"/>
+          </a:p>
+        </p:txBody>
+      </p:sp>
+      <p:sp>
+        <p:nvSpPr>
+          <p:cNvPr id="36" name="Shape 34"/>
+          <p:cNvSpPr/>
+          <p:nvPr/>
+        </p:nvSpPr>
+        <p:spPr>
+          <a:xfrm>
+            <a:off x="5733288" y="1632204"/>
+            <a:ext cx="246888" cy="73152"/>
+          </a:xfrm>
+          <a:prstGeom prst="rect">
+            <a:avLst>
+              <a:gd name="adj" fmla="val 25000"/>
+            </a:avLst>
+          </a:prstGeom>
+          <a:solidFill>
+            <a:srgbClr val="64748B"/>
+          </a:solidFill>
+          <a:ln/>
+        </p:spPr>
+      </p:sp>
+      <p:sp>
+        <p:nvSpPr>
+          <p:cNvPr id="37" name="Text 35"/>
+          <p:cNvSpPr/>
+          <p:nvPr/>
+        </p:nvSpPr>
+        <p:spPr>
+          <a:xfrm>
+            <a:off x="5943600" y="1540764"/>
+            <a:ext cx="219456" cy="256032"/>
+          </a:xfrm>
+          <a:prstGeom prst="rect">
+            <a:avLst/>
+          </a:prstGeom>
+          <a:noFill/>
+          <a:ln/>
+        </p:spPr>
+        <p:txBody>
+          <a:bodyPr wrap="square" rtlCol="0" anchor="ctr"/>
+          <a:lstStyle/>
+          <a:p>
+            <a:pPr algn="ctr" indent="0" marL="0">
+              <a:buNone/>
+            </a:pPr>
+            <a:r>
+              <a:rPr lang="en-US" sz="1400" dirty="0">
+                <a:solidFill>
+                  <a:srgbClr val="64748B"/>
+                </a:solidFill>
+                <a:latin typeface="Arial" pitchFamily="34" charset="0"/>
+                <a:ea typeface="Arial" pitchFamily="34" charset="-122"/>
+                <a:cs typeface="Arial" pitchFamily="34" charset="-120"/>
+              </a:rPr>
+              <a:t>▶</a:t>
+            </a:r>
+            <a:endParaRPr lang="en-US" sz="1400" dirty="0"/>
+          </a:p>
+        </p:txBody>
+      </p:sp>
+      <p:sp>
+        <p:nvSpPr>
+          <p:cNvPr id="38" name="Shape 36"/>
+          <p:cNvSpPr/>
+          <p:nvPr/>
+        </p:nvSpPr>
+        <p:spPr>
+          <a:xfrm>
+            <a:off x="8430768" y="1632204"/>
+            <a:ext cx="246888" cy="73152"/>
+          </a:xfrm>
+          <a:prstGeom prst="rect">
+            <a:avLst>
+              <a:gd name="adj" fmla="val 25000"/>
+            </a:avLst>
+          </a:prstGeom>
+          <a:solidFill>
+            <a:srgbClr val="64748B"/>
+          </a:solidFill>
+          <a:ln/>
+        </p:spPr>
+      </p:sp>
+      <p:sp>
+        <p:nvSpPr>
+          <p:cNvPr id="39" name="Text 37"/>
+          <p:cNvSpPr/>
+          <p:nvPr/>
+        </p:nvSpPr>
+        <p:spPr>
+          <a:xfrm>
+            <a:off x="8641080" y="1540764"/>
+            <a:ext cx="219456" cy="256032"/>
+          </a:xfrm>
+          <a:prstGeom prst="rect">
+            <a:avLst/>
+          </a:prstGeom>
+          <a:noFill/>
+          <a:ln/>
+        </p:spPr>
+        <p:txBody>
+          <a:bodyPr wrap="square" rtlCol="0" anchor="ctr"/>
+          <a:lstStyle/>
+          <a:p>
+            <a:pPr algn="ctr" indent="0" marL="0">
+              <a:buNone/>
+            </a:pPr>
+            <a:r>
+              <a:rPr lang="en-US" sz="1400" dirty="0">
+                <a:solidFill>
+                  <a:srgbClr val="64748B"/>
+                </a:solidFill>
+                <a:latin typeface="Arial" pitchFamily="34" charset="0"/>
+                <a:ea typeface="Arial" pitchFamily="34" charset="-122"/>
+                <a:cs typeface="Arial" pitchFamily="34" charset="-120"/>
+              </a:rPr>
+              <a:t>▶</a:t>
+            </a:r>
+            <a:endParaRPr lang="en-US" sz="1400" dirty="0"/>
+          </a:p>
+        </p:txBody>
+      </p:sp>
+      <p:sp>
+        <p:nvSpPr>
+          <p:cNvPr id="40" name="Shape 38"/>
+          <p:cNvSpPr/>
+          <p:nvPr/>
+        </p:nvSpPr>
+        <p:spPr>
+          <a:xfrm>
+            <a:off x="182880" y="2587752"/>
+            <a:ext cx="11795760" cy="274320"/>
+          </a:xfrm>
+          <a:prstGeom prst="rect">
+            <a:avLst>
+              <a:gd name="adj" fmla="val 13333"/>
+            </a:avLst>
+          </a:prstGeom>
+          <a:solidFill>
+            <a:srgbClr val="F1F5F9"/>
+          </a:solidFill>
+          <a:ln/>
+        </p:spPr>
+      </p:sp>
+      <p:sp>
+        <p:nvSpPr>
+          <p:cNvPr id="41" name="Text 39"/>
+          <p:cNvSpPr/>
+          <p:nvPr/>
+        </p:nvSpPr>
+        <p:spPr>
+          <a:xfrm>
+            <a:off x="320040" y="2587752"/>
+            <a:ext cx="10972800" cy="274320"/>
+          </a:xfrm>
+          <a:prstGeom prst="rect">
+            <a:avLst/>
+          </a:prstGeom>
+          <a:noFill/>
+          <a:ln/>
+        </p:spPr>
+        <p:txBody>
+          <a:bodyPr wrap="square" rtlCol="0" anchor="ctr"/>
+          <a:lstStyle/>
+          <a:p>
+            <a:pPr indent="0" marL="0">
+              <a:buNone/>
+            </a:pPr>
+            <a:r>
+              <a:rPr lang="en-US" sz="900" b="1" dirty="0">
+                <a:solidFill>
+                  <a:srgbClr val="94A3B8"/>
+                </a:solidFill>
+                <a:latin typeface="Calibri" pitchFamily="34" charset="0"/>
+                <a:ea typeface="Calibri" pitchFamily="34" charset="-122"/>
+                <a:cs typeface="Calibri" pitchFamily="34" charset="-120"/>
+              </a:rPr>
+              <a:t>PHASE 2 — AI DIAGNOSIS &amp; FIX GENERATION</a:t>
+            </a:r>
+            <a:endParaRPr lang="en-US" sz="900" dirty="0"/>
+          </a:p>
+        </p:txBody>
+      </p:sp>
+      <p:sp>
+        <p:nvSpPr>
+          <p:cNvPr id="42" name="Shape 40"/>
+          <p:cNvSpPr/>
+          <p:nvPr/>
+        </p:nvSpPr>
+        <p:spPr>
+          <a:xfrm>
+            <a:off x="12170664" y="2377440"/>
+            <a:ext cx="73152" cy="365760"/>
+          </a:xfrm>
+          <a:prstGeom prst="rect">
+            <a:avLst>
+              <a:gd name="adj" fmla="val 25000"/>
+            </a:avLst>
+          </a:prstGeom>
+          <a:solidFill>
+            <a:srgbClr val="64748B"/>
+          </a:solidFill>
+          <a:ln/>
+        </p:spPr>
+      </p:sp>
+      <p:sp>
+        <p:nvSpPr>
+          <p:cNvPr id="43" name="Shape 41"/>
+          <p:cNvSpPr/>
+          <p:nvPr/>
+        </p:nvSpPr>
+        <p:spPr>
+          <a:xfrm>
+            <a:off x="-45720" y="2706624"/>
+            <a:ext cx="12481560" cy="73152"/>
+          </a:xfrm>
+          <a:prstGeom prst="rect">
+            <a:avLst>
+              <a:gd name="adj" fmla="val 25000"/>
+            </a:avLst>
+          </a:prstGeom>
+          <a:solidFill>
+            <a:srgbClr val="64748B"/>
+          </a:solidFill>
+          <a:ln/>
+        </p:spPr>
+      </p:sp>
+      <p:sp>
+        <p:nvSpPr>
+          <p:cNvPr id="44" name="Shape 42"/>
+          <p:cNvSpPr/>
+          <p:nvPr/>
+        </p:nvSpPr>
+        <p:spPr>
+          <a:xfrm>
+            <a:off x="-45720" y="2743200"/>
+            <a:ext cx="73152" cy="100584"/>
+          </a:xfrm>
+          <a:prstGeom prst="rect">
+            <a:avLst>
+              <a:gd name="adj" fmla="val 25000"/>
+            </a:avLst>
+          </a:prstGeom>
+          <a:solidFill>
+            <a:srgbClr val="64748B"/>
+          </a:solidFill>
+          <a:ln/>
+        </p:spPr>
+      </p:sp>
+      <p:sp>
+        <p:nvSpPr>
+          <p:cNvPr id="45" name="Text 43"/>
+          <p:cNvSpPr/>
+          <p:nvPr/>
+        </p:nvSpPr>
+        <p:spPr>
+          <a:xfrm>
+            <a:off x="-137160" y="2642616"/>
+            <a:ext cx="256032" cy="219456"/>
+          </a:xfrm>
+          <a:prstGeom prst="rect">
+            <a:avLst/>
+          </a:prstGeom>
+          <a:noFill/>
+          <a:ln/>
+        </p:spPr>
+        <p:txBody>
+          <a:bodyPr wrap="square" rtlCol="0" anchor="ctr"/>
+          <a:lstStyle/>
+          <a:p>
+            <a:pPr algn="ctr" indent="0" marL="0">
+              <a:buNone/>
+            </a:pPr>
+            <a:r>
+              <a:rPr lang="en-US" sz="1200" dirty="0">
+                <a:solidFill>
+                  <a:srgbClr val="64748B"/>
+                </a:solidFill>
+                <a:latin typeface="Arial" pitchFamily="34" charset="0"/>
+                <a:ea typeface="Arial" pitchFamily="34" charset="-122"/>
+                <a:cs typeface="Arial" pitchFamily="34" charset="-120"/>
+              </a:rPr>
+              <a:t>▼</a:t>
+            </a:r>
+            <a:endParaRPr lang="en-US" sz="1200" dirty="0"/>
+          </a:p>
+        </p:txBody>
+      </p:sp>
+      <p:sp>
+        <p:nvSpPr>
+          <p:cNvPr id="46" name="Shape 44"/>
+          <p:cNvSpPr/>
+          <p:nvPr/>
+        </p:nvSpPr>
+        <p:spPr>
+          <a:xfrm>
+            <a:off x="182880" y="2880360"/>
+            <a:ext cx="3017520" cy="1417320"/>
+          </a:xfrm>
+          <a:prstGeom prst="rect">
+            <a:avLst>
+              <a:gd name="adj" fmla="val 6452"/>
+            </a:avLst>
+          </a:prstGeom>
+          <a:solidFill>
             <a:srgbClr val="EDE9FE"/>
           </a:solidFill>
-          <a:ln w="19050">
+          <a:ln w="22860">
             <a:solidFill>
               <a:srgbClr val="7C3AED"/>
             </a:solidFill>
@@ -4823,14 +5233,14 @@
       </p:sp>
       <p:sp>
         <p:nvSpPr>
-          <p:cNvPr id="33" name="Shape 31"/>
-          <p:cNvSpPr/>
-          <p:nvPr/>
-        </p:nvSpPr>
-        <p:spPr>
-          <a:xfrm>
-            <a:off x="347472" y="2816352"/>
-            <a:ext cx="292608" cy="292608"/>
+          <p:cNvPr id="47" name="Shape 45"/>
+          <p:cNvSpPr/>
+          <p:nvPr/>
+        </p:nvSpPr>
+        <p:spPr>
+          <a:xfrm>
+            <a:off x="274320" y="2971800"/>
+            <a:ext cx="274320" cy="274320"/>
           </a:xfrm>
           <a:prstGeom prst="ellipse">
             <a:avLst/>
@@ -4843,14 +5253,14 @@
       </p:sp>
       <p:sp>
         <p:nvSpPr>
-          <p:cNvPr id="34" name="Text 32"/>
-          <p:cNvSpPr/>
-          <p:nvPr/>
-        </p:nvSpPr>
-        <p:spPr>
-          <a:xfrm>
-            <a:off x="347472" y="2816352"/>
-            <a:ext cx="292608" cy="292608"/>
+          <p:cNvPr id="48" name="Text 46"/>
+          <p:cNvSpPr/>
+          <p:nvPr/>
+        </p:nvSpPr>
+        <p:spPr>
+          <a:xfrm>
+            <a:off x="274320" y="2971800"/>
+            <a:ext cx="274320" cy="274320"/>
           </a:xfrm>
           <a:prstGeom prst="rect">
             <a:avLst/>
@@ -4866,7 +5276,7 @@
               <a:buNone/>
             </a:pPr>
             <a:r>
-              <a:rPr lang="en-US" sz="1000" b="1" dirty="0">
+              <a:rPr lang="en-US" sz="1100" b="1" dirty="0">
                 <a:solidFill>
                   <a:srgbClr val="FFFFFF"/>
                 </a:solidFill>
@@ -4876,20 +5286,20 @@
               </a:rPr>
               <a:t>5</a:t>
             </a:r>
-            <a:endParaRPr lang="en-US" sz="1000" dirty="0"/>
-          </a:p>
-        </p:txBody>
-      </p:sp>
-      <p:sp>
-        <p:nvSpPr>
-          <p:cNvPr id="35" name="Text 33"/>
-          <p:cNvSpPr/>
-          <p:nvPr/>
-        </p:nvSpPr>
-        <p:spPr>
-          <a:xfrm>
-            <a:off x="685800" y="2798064"/>
-            <a:ext cx="2514600" cy="320040"/>
+            <a:endParaRPr lang="en-US" sz="1100" dirty="0"/>
+          </a:p>
+        </p:txBody>
+      </p:sp>
+      <p:sp>
+        <p:nvSpPr>
+          <p:cNvPr id="49" name="Text 47"/>
+          <p:cNvSpPr/>
+          <p:nvPr/>
+        </p:nvSpPr>
+        <p:spPr>
+          <a:xfrm>
+            <a:off x="621792" y="2953512"/>
+            <a:ext cx="2487168" cy="292608"/>
           </a:xfrm>
           <a:prstGeom prst="rect">
             <a:avLst/>
@@ -4907,7 +5317,7 @@
             <a:r>
               <a:rPr lang="en-US" sz="1100" b="1" dirty="0">
                 <a:solidFill>
-                  <a:srgbClr val="7C3AED"/>
+                  <a:srgbClr val="5B21B6"/>
                 </a:solidFill>
                 <a:latin typeface="Calibri" pitchFamily="34" charset="0"/>
                 <a:ea typeface="Calibri" pitchFamily="34" charset="-122"/>
@@ -4921,14 +5331,14 @@
       </p:sp>
       <p:sp>
         <p:nvSpPr>
-          <p:cNvPr id="36" name="Text 34"/>
-          <p:cNvSpPr/>
-          <p:nvPr/>
-        </p:nvSpPr>
-        <p:spPr>
-          <a:xfrm>
-            <a:off x="384048" y="3127248"/>
-            <a:ext cx="2798064" cy="914400"/>
+          <p:cNvPr id="50" name="Text 48"/>
+          <p:cNvSpPr/>
+          <p:nvPr/>
+        </p:nvSpPr>
+        <p:spPr>
+          <a:xfrm>
+            <a:off x="292608" y="3282696"/>
+            <a:ext cx="2798064" cy="941832"/>
           </a:xfrm>
           <a:prstGeom prst="rect">
             <a:avLst/>
@@ -4942,7 +5352,7 @@
           <a:p>
             <a:pPr indent="0" marL="0">
               <a:lnSpc>
-                <a:spcPct val="115000"/>
+                <a:spcPct val="120000"/>
               </a:lnSpc>
               <a:buNone/>
             </a:pPr>
@@ -4955,14 +5365,14 @@
                 <a:ea typeface="Calibri" pitchFamily="34" charset="-122"/>
                 <a:cs typeface="Calibri" pitchFamily="34" charset="-120"/>
               </a:rPr>
-              <a:t>Rule Engine: OOMKilled pattern</a:t>
+              <a:t>Rule Engine: OOMKilled match</a:t>
             </a:r>
             <a:endParaRPr lang="en-US" sz="850" dirty="0"/>
           </a:p>
           <a:p>
             <a:pPr indent="0" marL="0">
               <a:lnSpc>
-                <a:spcPct val="115000"/>
+                <a:spcPct val="120000"/>
               </a:lnSpc>
               <a:buNone/>
             </a:pPr>
@@ -4975,14 +5385,14 @@
                 <a:ea typeface="Calibri" pitchFamily="34" charset="-122"/>
                 <a:cs typeface="Calibri" pitchFamily="34" charset="-120"/>
               </a:rPr>
-              <a:t>LLM: "Memory ceiling insufficient</a:t>
+              <a:t>LLM: "Memory ceiling</a:t>
             </a:r>
             <a:endParaRPr lang="en-US" sz="850" dirty="0"/>
           </a:p>
           <a:p>
             <a:pPr indent="0" marL="0">
               <a:lnSpc>
-                <a:spcPct val="115000"/>
+                <a:spcPct val="120000"/>
               </a:lnSpc>
               <a:buNone/>
             </a:pPr>
@@ -4995,14 +5405,14 @@
                 <a:ea typeface="Calibri" pitchFamily="34" charset="-122"/>
                 <a:cs typeface="Calibri" pitchFamily="34" charset="-120"/>
               </a:rPr>
-              <a:t>for ML workload"</a:t>
+              <a:t>insufficient for ML workload"</a:t>
             </a:r>
             <a:endParaRPr lang="en-US" sz="850" dirty="0"/>
           </a:p>
           <a:p>
             <a:pPr indent="0" marL="0">
               <a:lnSpc>
-                <a:spcPct val="115000"/>
+                <a:spcPct val="120000"/>
               </a:lnSpc>
               <a:buNone/>
             </a:pPr>
@@ -5023,24 +5433,24 @@
       </p:sp>
       <p:sp>
         <p:nvSpPr>
-          <p:cNvPr id="37" name="Shape 35"/>
-          <p:cNvSpPr/>
-          <p:nvPr/>
-        </p:nvSpPr>
-        <p:spPr>
-          <a:xfrm>
-            <a:off x="3566160" y="2743200"/>
-            <a:ext cx="2468880" cy="1371600"/>
+          <p:cNvPr id="51" name="Shape 49"/>
+          <p:cNvSpPr/>
+          <p:nvPr/>
+        </p:nvSpPr>
+        <p:spPr>
+          <a:xfrm>
+            <a:off x="3611880" y="2880360"/>
+            <a:ext cx="2377440" cy="1417320"/>
           </a:xfrm>
           <a:prstGeom prst="rect">
             <a:avLst>
-              <a:gd name="adj" fmla="val 6667"/>
+              <a:gd name="adj" fmla="val 6452"/>
             </a:avLst>
           </a:prstGeom>
           <a:solidFill>
             <a:srgbClr val="EDE9FE"/>
           </a:solidFill>
-          <a:ln w="19050">
+          <a:ln w="22860">
             <a:solidFill>
               <a:srgbClr val="7C3AED"/>
             </a:solidFill>
@@ -5050,14 +5460,14 @@
       </p:sp>
       <p:sp>
         <p:nvSpPr>
-          <p:cNvPr id="38" name="Shape 36"/>
-          <p:cNvSpPr/>
-          <p:nvPr/>
-        </p:nvSpPr>
-        <p:spPr>
-          <a:xfrm>
-            <a:off x="3639312" y="2816352"/>
-            <a:ext cx="292608" cy="292608"/>
+          <p:cNvPr id="52" name="Shape 50"/>
+          <p:cNvSpPr/>
+          <p:nvPr/>
+        </p:nvSpPr>
+        <p:spPr>
+          <a:xfrm>
+            <a:off x="3703320" y="2971800"/>
+            <a:ext cx="274320" cy="274320"/>
           </a:xfrm>
           <a:prstGeom prst="ellipse">
             <a:avLst/>
@@ -5070,14 +5480,14 @@
       </p:sp>
       <p:sp>
         <p:nvSpPr>
-          <p:cNvPr id="39" name="Text 37"/>
-          <p:cNvSpPr/>
-          <p:nvPr/>
-        </p:nvSpPr>
-        <p:spPr>
-          <a:xfrm>
-            <a:off x="3639312" y="2816352"/>
-            <a:ext cx="292608" cy="292608"/>
+          <p:cNvPr id="53" name="Text 51"/>
+          <p:cNvSpPr/>
+          <p:nvPr/>
+        </p:nvSpPr>
+        <p:spPr>
+          <a:xfrm>
+            <a:off x="3703320" y="2971800"/>
+            <a:ext cx="274320" cy="274320"/>
           </a:xfrm>
           <a:prstGeom prst="rect">
             <a:avLst/>
@@ -5093,7 +5503,7 @@
               <a:buNone/>
             </a:pPr>
             <a:r>
-              <a:rPr lang="en-US" sz="1000" b="1" dirty="0">
+              <a:rPr lang="en-US" sz="1100" b="1" dirty="0">
                 <a:solidFill>
                   <a:srgbClr val="FFFFFF"/>
                 </a:solidFill>
@@ -5103,20 +5513,20 @@
               </a:rPr>
               <a:t>6</a:t>
             </a:r>
-            <a:endParaRPr lang="en-US" sz="1000" dirty="0"/>
-          </a:p>
-        </p:txBody>
-      </p:sp>
-      <p:sp>
-        <p:nvSpPr>
-          <p:cNvPr id="40" name="Text 38"/>
-          <p:cNvSpPr/>
-          <p:nvPr/>
-        </p:nvSpPr>
-        <p:spPr>
-          <a:xfrm>
-            <a:off x="3977640" y="2798064"/>
-            <a:ext cx="1965960" cy="320040"/>
+            <a:endParaRPr lang="en-US" sz="1100" dirty="0"/>
+          </a:p>
+        </p:txBody>
+      </p:sp>
+      <p:sp>
+        <p:nvSpPr>
+          <p:cNvPr id="54" name="Text 52"/>
+          <p:cNvSpPr/>
+          <p:nvPr/>
+        </p:nvSpPr>
+        <p:spPr>
+          <a:xfrm>
+            <a:off x="4050792" y="2953512"/>
+            <a:ext cx="1847088" cy="292608"/>
           </a:xfrm>
           <a:prstGeom prst="rect">
             <a:avLst/>
@@ -5134,7 +5544,7 @@
             <a:r>
               <a:rPr lang="en-US" sz="1100" b="1" dirty="0">
                 <a:solidFill>
-                  <a:srgbClr val="7C3AED"/>
+                  <a:srgbClr val="5B21B6"/>
                 </a:solidFill>
                 <a:latin typeface="Calibri" pitchFamily="34" charset="0"/>
                 <a:ea typeface="Calibri" pitchFamily="34" charset="-122"/>
@@ -5148,14 +5558,14 @@
       </p:sp>
       <p:sp>
         <p:nvSpPr>
-          <p:cNvPr id="41" name="Text 39"/>
-          <p:cNvSpPr/>
-          <p:nvPr/>
-        </p:nvSpPr>
-        <p:spPr>
-          <a:xfrm>
-            <a:off x="3675888" y="3127248"/>
-            <a:ext cx="2249424" cy="914400"/>
+          <p:cNvPr id="55" name="Text 53"/>
+          <p:cNvSpPr/>
+          <p:nvPr/>
+        </p:nvSpPr>
+        <p:spPr>
+          <a:xfrm>
+            <a:off x="3721608" y="3282696"/>
+            <a:ext cx="2157984" cy="941832"/>
           </a:xfrm>
           <a:prstGeom prst="rect">
             <a:avLst/>
@@ -5169,7 +5579,7 @@
           <a:p>
             <a:pPr indent="0" marL="0">
               <a:lnSpc>
-                <a:spcPct val="115000"/>
+                <a:spcPct val="120000"/>
               </a:lnSpc>
               <a:buNone/>
             </a:pPr>
@@ -5189,7 +5599,7 @@
           <a:p>
             <a:pPr indent="0" marL="0">
               <a:lnSpc>
-                <a:spcPct val="115000"/>
+                <a:spcPct val="120000"/>
               </a:lnSpc>
               <a:buNone/>
             </a:pPr>
@@ -5209,7 +5619,7 @@
           <a:p>
             <a:pPr indent="0" marL="0">
               <a:lnSpc>
-                <a:spcPct val="115000"/>
+                <a:spcPct val="120000"/>
               </a:lnSpc>
               <a:buNone/>
             </a:pPr>
@@ -5229,7 +5639,7 @@
           <a:p>
             <a:pPr indent="0" marL="0">
               <a:lnSpc>
-                <a:spcPct val="115000"/>
+                <a:spcPct val="120000"/>
               </a:lnSpc>
               <a:buNone/>
             </a:pPr>
@@ -5250,24 +5660,24 @@
       </p:sp>
       <p:sp>
         <p:nvSpPr>
-          <p:cNvPr id="42" name="Shape 40"/>
-          <p:cNvSpPr/>
-          <p:nvPr/>
-        </p:nvSpPr>
-        <p:spPr>
-          <a:xfrm>
-            <a:off x="6309360" y="2743200"/>
-            <a:ext cx="2468880" cy="1371600"/>
+          <p:cNvPr id="56" name="Shape 54"/>
+          <p:cNvSpPr/>
+          <p:nvPr/>
+        </p:nvSpPr>
+        <p:spPr>
+          <a:xfrm>
+            <a:off x="6400800" y="2880360"/>
+            <a:ext cx="2560320" cy="1417320"/>
           </a:xfrm>
           <a:prstGeom prst="rect">
             <a:avLst>
-              <a:gd name="adj" fmla="val 6667"/>
+              <a:gd name="adj" fmla="val 6452"/>
             </a:avLst>
           </a:prstGeom>
           <a:solidFill>
             <a:srgbClr val="D1FAE5"/>
           </a:solidFill>
-          <a:ln w="19050">
+          <a:ln w="22860">
             <a:solidFill>
               <a:srgbClr val="059669"/>
             </a:solidFill>
@@ -5277,14 +5687,14 @@
       </p:sp>
       <p:sp>
         <p:nvSpPr>
-          <p:cNvPr id="43" name="Shape 41"/>
-          <p:cNvSpPr/>
-          <p:nvPr/>
-        </p:nvSpPr>
-        <p:spPr>
-          <a:xfrm>
-            <a:off x="6382512" y="2816352"/>
-            <a:ext cx="292608" cy="292608"/>
+          <p:cNvPr id="57" name="Shape 55"/>
+          <p:cNvSpPr/>
+          <p:nvPr/>
+        </p:nvSpPr>
+        <p:spPr>
+          <a:xfrm>
+            <a:off x="6492240" y="2971800"/>
+            <a:ext cx="274320" cy="274320"/>
           </a:xfrm>
           <a:prstGeom prst="ellipse">
             <a:avLst/>
@@ -5297,14 +5707,14 @@
       </p:sp>
       <p:sp>
         <p:nvSpPr>
-          <p:cNvPr id="44" name="Text 42"/>
-          <p:cNvSpPr/>
-          <p:nvPr/>
-        </p:nvSpPr>
-        <p:spPr>
-          <a:xfrm>
-            <a:off x="6382512" y="2816352"/>
-            <a:ext cx="292608" cy="292608"/>
+          <p:cNvPr id="58" name="Text 56"/>
+          <p:cNvSpPr/>
+          <p:nvPr/>
+        </p:nvSpPr>
+        <p:spPr>
+          <a:xfrm>
+            <a:off x="6492240" y="2971800"/>
+            <a:ext cx="274320" cy="274320"/>
           </a:xfrm>
           <a:prstGeom prst="rect">
             <a:avLst/>
@@ -5320,7 +5730,7 @@
               <a:buNone/>
             </a:pPr>
             <a:r>
-              <a:rPr lang="en-US" sz="1000" b="1" dirty="0">
+              <a:rPr lang="en-US" sz="1100" b="1" dirty="0">
                 <a:solidFill>
                   <a:srgbClr val="FFFFFF"/>
                 </a:solidFill>
@@ -5330,20 +5740,20 @@
               </a:rPr>
               <a:t>7</a:t>
             </a:r>
-            <a:endParaRPr lang="en-US" sz="1000" dirty="0"/>
-          </a:p>
-        </p:txBody>
-      </p:sp>
-      <p:sp>
-        <p:nvSpPr>
-          <p:cNvPr id="45" name="Text 43"/>
-          <p:cNvSpPr/>
-          <p:nvPr/>
-        </p:nvSpPr>
-        <p:spPr>
-          <a:xfrm>
-            <a:off x="6720840" y="2798064"/>
-            <a:ext cx="1965960" cy="320040"/>
+            <a:endParaRPr lang="en-US" sz="1100" dirty="0"/>
+          </a:p>
+        </p:txBody>
+      </p:sp>
+      <p:sp>
+        <p:nvSpPr>
+          <p:cNvPr id="59" name="Text 57"/>
+          <p:cNvSpPr/>
+          <p:nvPr/>
+        </p:nvSpPr>
+        <p:spPr>
+          <a:xfrm>
+            <a:off x="6839712" y="2953512"/>
+            <a:ext cx="2029968" cy="292608"/>
           </a:xfrm>
           <a:prstGeom prst="rect">
             <a:avLst/>
@@ -5361,7 +5771,7 @@
             <a:r>
               <a:rPr lang="en-US" sz="1100" b="1" dirty="0">
                 <a:solidFill>
-                  <a:srgbClr val="059669"/>
+                  <a:srgbClr val="065F46"/>
                 </a:solidFill>
                 <a:latin typeface="Calibri" pitchFamily="34" charset="0"/>
                 <a:ea typeface="Calibri" pitchFamily="34" charset="-122"/>
@@ -5375,14 +5785,14 @@
       </p:sp>
       <p:sp>
         <p:nvSpPr>
-          <p:cNvPr id="46" name="Text 44"/>
-          <p:cNvSpPr/>
-          <p:nvPr/>
-        </p:nvSpPr>
-        <p:spPr>
-          <a:xfrm>
-            <a:off x="6419088" y="3127248"/>
-            <a:ext cx="2249424" cy="914400"/>
+          <p:cNvPr id="60" name="Text 58"/>
+          <p:cNvSpPr/>
+          <p:nvPr/>
+        </p:nvSpPr>
+        <p:spPr>
+          <a:xfrm>
+            <a:off x="6510528" y="3282696"/>
+            <a:ext cx="2340864" cy="941832"/>
           </a:xfrm>
           <a:prstGeom prst="rect">
             <a:avLst/>
@@ -5396,7 +5806,7 @@
           <a:p>
             <a:pPr indent="0" marL="0">
               <a:lnSpc>
-                <a:spcPct val="115000"/>
+                <a:spcPct val="120000"/>
               </a:lnSpc>
               <a:buNone/>
             </a:pPr>
@@ -5416,7 +5826,7 @@
           <a:p>
             <a:pPr indent="0" marL="0">
               <a:lnSpc>
-                <a:spcPct val="115000"/>
+                <a:spcPct val="120000"/>
               </a:lnSpc>
               <a:buNone/>
             </a:pPr>
@@ -5436,7 +5846,7 @@
           <a:p>
             <a:pPr indent="0" marL="0">
               <a:lnSpc>
-                <a:spcPct val="115000"/>
+                <a:spcPct val="120000"/>
               </a:lnSpc>
               <a:buNone/>
             </a:pPr>
@@ -5456,7 +5866,7 @@
           <a:p>
             <a:pPr indent="0" marL="0">
               <a:lnSpc>
-                <a:spcPct val="115000"/>
+                <a:spcPct val="120000"/>
               </a:lnSpc>
               <a:buNone/>
             </a:pPr>
@@ -5469,7 +5879,7 @@
                 <a:ea typeface="Calibri" pitchFamily="34" charset="-122"/>
                 <a:cs typeface="Calibri" pitchFamily="34" charset="-120"/>
               </a:rPr>
-              <a:t>Auto-populated fields</a:t>
+              <a:t>All fields auto-populated</a:t>
             </a:r>
             <a:endParaRPr lang="en-US" sz="850" dirty="0"/>
           </a:p>
@@ -5477,24 +5887,24 @@
       </p:sp>
       <p:sp>
         <p:nvSpPr>
-          <p:cNvPr id="47" name="Shape 45"/>
-          <p:cNvSpPr/>
-          <p:nvPr/>
-        </p:nvSpPr>
-        <p:spPr>
-          <a:xfrm>
-            <a:off x="9052560" y="2743200"/>
-            <a:ext cx="2834640" cy="1371600"/>
+          <p:cNvPr id="61" name="Shape 59"/>
+          <p:cNvSpPr/>
+          <p:nvPr/>
+        </p:nvSpPr>
+        <p:spPr>
+          <a:xfrm>
+            <a:off x="9372600" y="2880360"/>
+            <a:ext cx="2606040" cy="1417320"/>
           </a:xfrm>
           <a:prstGeom prst="rect">
             <a:avLst>
-              <a:gd name="adj" fmla="val 6667"/>
+              <a:gd name="adj" fmla="val 6452"/>
             </a:avLst>
           </a:prstGeom>
           <a:solidFill>
             <a:srgbClr val="D1FAE5"/>
           </a:solidFill>
-          <a:ln w="19050">
+          <a:ln w="22860">
             <a:solidFill>
               <a:srgbClr val="059669"/>
             </a:solidFill>
@@ -5504,14 +5914,14 @@
       </p:sp>
       <p:sp>
         <p:nvSpPr>
-          <p:cNvPr id="48" name="Shape 46"/>
-          <p:cNvSpPr/>
-          <p:nvPr/>
-        </p:nvSpPr>
-        <p:spPr>
-          <a:xfrm>
-            <a:off x="9125712" y="2816352"/>
-            <a:ext cx="292608" cy="292608"/>
+          <p:cNvPr id="62" name="Shape 60"/>
+          <p:cNvSpPr/>
+          <p:nvPr/>
+        </p:nvSpPr>
+        <p:spPr>
+          <a:xfrm>
+            <a:off x="9464040" y="2971800"/>
+            <a:ext cx="274320" cy="274320"/>
           </a:xfrm>
           <a:prstGeom prst="ellipse">
             <a:avLst/>
@@ -5524,14 +5934,14 @@
       </p:sp>
       <p:sp>
         <p:nvSpPr>
-          <p:cNvPr id="49" name="Text 47"/>
-          <p:cNvSpPr/>
-          <p:nvPr/>
-        </p:nvSpPr>
-        <p:spPr>
-          <a:xfrm>
-            <a:off x="9125712" y="2816352"/>
-            <a:ext cx="292608" cy="292608"/>
+          <p:cNvPr id="63" name="Text 61"/>
+          <p:cNvSpPr/>
+          <p:nvPr/>
+        </p:nvSpPr>
+        <p:spPr>
+          <a:xfrm>
+            <a:off x="9464040" y="2971800"/>
+            <a:ext cx="274320" cy="274320"/>
           </a:xfrm>
           <a:prstGeom prst="rect">
             <a:avLst/>
@@ -5547,7 +5957,7 @@
               <a:buNone/>
             </a:pPr>
             <a:r>
-              <a:rPr lang="en-US" sz="1000" b="1" dirty="0">
+              <a:rPr lang="en-US" sz="1100" b="1" dirty="0">
                 <a:solidFill>
                   <a:srgbClr val="FFFFFF"/>
                 </a:solidFill>
@@ -5557,20 +5967,20 @@
               </a:rPr>
               <a:t>8</a:t>
             </a:r>
-            <a:endParaRPr lang="en-US" sz="1000" dirty="0"/>
-          </a:p>
-        </p:txBody>
-      </p:sp>
-      <p:sp>
-        <p:nvSpPr>
-          <p:cNvPr id="50" name="Text 48"/>
-          <p:cNvSpPr/>
-          <p:nvPr/>
-        </p:nvSpPr>
-        <p:spPr>
-          <a:xfrm>
-            <a:off x="9464040" y="2798064"/>
-            <a:ext cx="2331720" cy="320040"/>
+            <a:endParaRPr lang="en-US" sz="1100" dirty="0"/>
+          </a:p>
+        </p:txBody>
+      </p:sp>
+      <p:sp>
+        <p:nvSpPr>
+          <p:cNvPr id="64" name="Text 62"/>
+          <p:cNvSpPr/>
+          <p:nvPr/>
+        </p:nvSpPr>
+        <p:spPr>
+          <a:xfrm>
+            <a:off x="9811512" y="2953512"/>
+            <a:ext cx="2075688" cy="292608"/>
           </a:xfrm>
           <a:prstGeom prst="rect">
             <a:avLst/>
@@ -5588,7 +5998,7 @@
             <a:r>
               <a:rPr lang="en-US" sz="1100" b="1" dirty="0">
                 <a:solidFill>
-                  <a:srgbClr val="059669"/>
+                  <a:srgbClr val="065F46"/>
                 </a:solidFill>
                 <a:latin typeface="Calibri" pitchFamily="34" charset="0"/>
                 <a:ea typeface="Calibri" pitchFamily="34" charset="-122"/>
@@ -5602,14 +6012,14 @@
       </p:sp>
       <p:sp>
         <p:nvSpPr>
-          <p:cNvPr id="51" name="Text 49"/>
-          <p:cNvSpPr/>
-          <p:nvPr/>
-        </p:nvSpPr>
-        <p:spPr>
-          <a:xfrm>
-            <a:off x="9162288" y="3127248"/>
-            <a:ext cx="2615184" cy="914400"/>
+          <p:cNvPr id="65" name="Text 63"/>
+          <p:cNvSpPr/>
+          <p:nvPr/>
+        </p:nvSpPr>
+        <p:spPr>
+          <a:xfrm>
+            <a:off x="9482328" y="3282696"/>
+            <a:ext cx="2386584" cy="941832"/>
           </a:xfrm>
           <a:prstGeom prst="rect">
             <a:avLst/>
@@ -5623,7 +6033,7 @@
           <a:p>
             <a:pPr indent="0" marL="0">
               <a:lnSpc>
-                <a:spcPct val="115000"/>
+                <a:spcPct val="120000"/>
               </a:lnSpc>
               <a:buNone/>
             </a:pPr>
@@ -5643,7 +6053,7 @@
           <a:p>
             <a:pPr indent="0" marL="0">
               <a:lnSpc>
-                <a:spcPct val="115000"/>
+                <a:spcPct val="120000"/>
               </a:lnSpc>
               <a:buNone/>
             </a:pPr>
@@ -5656,14 +6066,14 @@
                 <a:ea typeface="Calibri" pitchFamily="34" charset="-122"/>
                 <a:cs typeface="Calibri" pitchFamily="34" charset="-120"/>
               </a:rPr>
-              <a:t>Before metrics snapshot</a:t>
+              <a:t>Before-metrics snapshot</a:t>
             </a:r>
             <a:endParaRPr lang="en-US" sz="850" dirty="0"/>
           </a:p>
           <a:p>
             <a:pPr indent="0" marL="0">
               <a:lnSpc>
-                <a:spcPct val="115000"/>
+                <a:spcPct val="120000"/>
               </a:lnSpc>
               <a:buNone/>
             </a:pPr>
@@ -5683,7 +6093,7 @@
           <a:p>
             <a:pPr indent="0" marL="0">
               <a:lnSpc>
-                <a:spcPct val="115000"/>
+                <a:spcPct val="120000"/>
               </a:lnSpc>
               <a:buNone/>
             </a:pPr>
@@ -5704,24 +6114,373 @@
       </p:sp>
       <p:sp>
         <p:nvSpPr>
-          <p:cNvPr id="52" name="Shape 50"/>
-          <p:cNvSpPr/>
-          <p:nvPr/>
-        </p:nvSpPr>
-        <p:spPr>
-          <a:xfrm>
-            <a:off x="274320" y="4480560"/>
-            <a:ext cx="2468880" cy="1371600"/>
+          <p:cNvPr id="66" name="Shape 64"/>
+          <p:cNvSpPr/>
+          <p:nvPr/>
+        </p:nvSpPr>
+        <p:spPr>
+          <a:xfrm>
+            <a:off x="3218688" y="3552444"/>
+            <a:ext cx="246888" cy="73152"/>
           </a:xfrm>
           <a:prstGeom prst="rect">
             <a:avLst>
-              <a:gd name="adj" fmla="val 6667"/>
+              <a:gd name="adj" fmla="val 25000"/>
             </a:avLst>
           </a:prstGeom>
           <a:solidFill>
+            <a:srgbClr val="64748B"/>
+          </a:solidFill>
+          <a:ln/>
+        </p:spPr>
+      </p:sp>
+      <p:sp>
+        <p:nvSpPr>
+          <p:cNvPr id="67" name="Text 65"/>
+          <p:cNvSpPr/>
+          <p:nvPr/>
+        </p:nvSpPr>
+        <p:spPr>
+          <a:xfrm>
+            <a:off x="3429000" y="3461004"/>
+            <a:ext cx="219456" cy="256032"/>
+          </a:xfrm>
+          <a:prstGeom prst="rect">
+            <a:avLst/>
+          </a:prstGeom>
+          <a:noFill/>
+          <a:ln/>
+        </p:spPr>
+        <p:txBody>
+          <a:bodyPr wrap="square" rtlCol="0" anchor="ctr"/>
+          <a:lstStyle/>
+          <a:p>
+            <a:pPr algn="ctr" indent="0" marL="0">
+              <a:buNone/>
+            </a:pPr>
+            <a:r>
+              <a:rPr lang="en-US" sz="1400" dirty="0">
+                <a:solidFill>
+                  <a:srgbClr val="64748B"/>
+                </a:solidFill>
+                <a:latin typeface="Arial" pitchFamily="34" charset="0"/>
+                <a:ea typeface="Arial" pitchFamily="34" charset="-122"/>
+                <a:cs typeface="Arial" pitchFamily="34" charset="-120"/>
+              </a:rPr>
+              <a:t>▶</a:t>
+            </a:r>
+            <a:endParaRPr lang="en-US" sz="1400" dirty="0"/>
+          </a:p>
+        </p:txBody>
+      </p:sp>
+      <p:sp>
+        <p:nvSpPr>
+          <p:cNvPr id="68" name="Shape 66"/>
+          <p:cNvSpPr/>
+          <p:nvPr/>
+        </p:nvSpPr>
+        <p:spPr>
+          <a:xfrm>
+            <a:off x="6007608" y="3552444"/>
+            <a:ext cx="246888" cy="73152"/>
+          </a:xfrm>
+          <a:prstGeom prst="rect">
+            <a:avLst>
+              <a:gd name="adj" fmla="val 25000"/>
+            </a:avLst>
+          </a:prstGeom>
+          <a:solidFill>
+            <a:srgbClr val="64748B"/>
+          </a:solidFill>
+          <a:ln/>
+        </p:spPr>
+      </p:sp>
+      <p:sp>
+        <p:nvSpPr>
+          <p:cNvPr id="69" name="Text 67"/>
+          <p:cNvSpPr/>
+          <p:nvPr/>
+        </p:nvSpPr>
+        <p:spPr>
+          <a:xfrm>
+            <a:off x="6217920" y="3461004"/>
+            <a:ext cx="219456" cy="256032"/>
+          </a:xfrm>
+          <a:prstGeom prst="rect">
+            <a:avLst/>
+          </a:prstGeom>
+          <a:noFill/>
+          <a:ln/>
+        </p:spPr>
+        <p:txBody>
+          <a:bodyPr wrap="square" rtlCol="0" anchor="ctr"/>
+          <a:lstStyle/>
+          <a:p>
+            <a:pPr algn="ctr" indent="0" marL="0">
+              <a:buNone/>
+            </a:pPr>
+            <a:r>
+              <a:rPr lang="en-US" sz="1400" dirty="0">
+                <a:solidFill>
+                  <a:srgbClr val="64748B"/>
+                </a:solidFill>
+                <a:latin typeface="Arial" pitchFamily="34" charset="0"/>
+                <a:ea typeface="Arial" pitchFamily="34" charset="-122"/>
+                <a:cs typeface="Arial" pitchFamily="34" charset="-120"/>
+              </a:rPr>
+              <a:t>▶</a:t>
+            </a:r>
+            <a:endParaRPr lang="en-US" sz="1400" dirty="0"/>
+          </a:p>
+        </p:txBody>
+      </p:sp>
+      <p:sp>
+        <p:nvSpPr>
+          <p:cNvPr id="70" name="Shape 68"/>
+          <p:cNvSpPr/>
+          <p:nvPr/>
+        </p:nvSpPr>
+        <p:spPr>
+          <a:xfrm>
+            <a:off x="8979408" y="3552444"/>
+            <a:ext cx="246888" cy="73152"/>
+          </a:xfrm>
+          <a:prstGeom prst="rect">
+            <a:avLst>
+              <a:gd name="adj" fmla="val 25000"/>
+            </a:avLst>
+          </a:prstGeom>
+          <a:solidFill>
+            <a:srgbClr val="64748B"/>
+          </a:solidFill>
+          <a:ln/>
+        </p:spPr>
+      </p:sp>
+      <p:sp>
+        <p:nvSpPr>
+          <p:cNvPr id="71" name="Text 69"/>
+          <p:cNvSpPr/>
+          <p:nvPr/>
+        </p:nvSpPr>
+        <p:spPr>
+          <a:xfrm>
+            <a:off x="9189720" y="3461004"/>
+            <a:ext cx="219456" cy="256032"/>
+          </a:xfrm>
+          <a:prstGeom prst="rect">
+            <a:avLst/>
+          </a:prstGeom>
+          <a:noFill/>
+          <a:ln/>
+        </p:spPr>
+        <p:txBody>
+          <a:bodyPr wrap="square" rtlCol="0" anchor="ctr"/>
+          <a:lstStyle/>
+          <a:p>
+            <a:pPr algn="ctr" indent="0" marL="0">
+              <a:buNone/>
+            </a:pPr>
+            <a:r>
+              <a:rPr lang="en-US" sz="1400" dirty="0">
+                <a:solidFill>
+                  <a:srgbClr val="64748B"/>
+                </a:solidFill>
+                <a:latin typeface="Arial" pitchFamily="34" charset="0"/>
+                <a:ea typeface="Arial" pitchFamily="34" charset="-122"/>
+                <a:cs typeface="Arial" pitchFamily="34" charset="-120"/>
+              </a:rPr>
+              <a:t>▶</a:t>
+            </a:r>
+            <a:endParaRPr lang="en-US" sz="1400" dirty="0"/>
+          </a:p>
+        </p:txBody>
+      </p:sp>
+      <p:sp>
+        <p:nvSpPr>
+          <p:cNvPr id="72" name="Shape 70"/>
+          <p:cNvSpPr/>
+          <p:nvPr/>
+        </p:nvSpPr>
+        <p:spPr>
+          <a:xfrm>
+            <a:off x="182880" y="4507992"/>
+            <a:ext cx="11795760" cy="274320"/>
+          </a:xfrm>
+          <a:prstGeom prst="rect">
+            <a:avLst>
+              <a:gd name="adj" fmla="val 13333"/>
+            </a:avLst>
+          </a:prstGeom>
+          <a:solidFill>
+            <a:srgbClr val="F1F5F9"/>
+          </a:solidFill>
+          <a:ln/>
+        </p:spPr>
+      </p:sp>
+      <p:sp>
+        <p:nvSpPr>
+          <p:cNvPr id="73" name="Text 71"/>
+          <p:cNvSpPr/>
+          <p:nvPr/>
+        </p:nvSpPr>
+        <p:spPr>
+          <a:xfrm>
+            <a:off x="320040" y="4507992"/>
+            <a:ext cx="10972800" cy="274320"/>
+          </a:xfrm>
+          <a:prstGeom prst="rect">
+            <a:avLst/>
+          </a:prstGeom>
+          <a:noFill/>
+          <a:ln/>
+        </p:spPr>
+        <p:txBody>
+          <a:bodyPr wrap="square" rtlCol="0" anchor="ctr"/>
+          <a:lstStyle/>
+          <a:p>
+            <a:pPr indent="0" marL="0">
+              <a:buNone/>
+            </a:pPr>
+            <a:r>
+              <a:rPr lang="en-US" sz="900" b="1" dirty="0">
+                <a:solidFill>
+                  <a:srgbClr val="94A3B8"/>
+                </a:solidFill>
+                <a:latin typeface="Calibri" pitchFamily="34" charset="0"/>
+                <a:ea typeface="Calibri" pitchFamily="34" charset="-122"/>
+                <a:cs typeface="Calibri" pitchFamily="34" charset="-120"/>
+              </a:rPr>
+              <a:t>PHASE 3 — REMEDIATION, VALIDATION &amp; CLOSURE</a:t>
+            </a:r>
+            <a:endParaRPr lang="en-US" sz="900" dirty="0"/>
+          </a:p>
+        </p:txBody>
+      </p:sp>
+      <p:sp>
+        <p:nvSpPr>
+          <p:cNvPr id="74" name="Shape 72"/>
+          <p:cNvSpPr/>
+          <p:nvPr/>
+        </p:nvSpPr>
+        <p:spPr>
+          <a:xfrm>
+            <a:off x="12170664" y="4297680"/>
+            <a:ext cx="73152" cy="365760"/>
+          </a:xfrm>
+          <a:prstGeom prst="rect">
+            <a:avLst>
+              <a:gd name="adj" fmla="val 25000"/>
+            </a:avLst>
+          </a:prstGeom>
+          <a:solidFill>
+            <a:srgbClr val="64748B"/>
+          </a:solidFill>
+          <a:ln/>
+        </p:spPr>
+      </p:sp>
+      <p:sp>
+        <p:nvSpPr>
+          <p:cNvPr id="75" name="Shape 73"/>
+          <p:cNvSpPr/>
+          <p:nvPr/>
+        </p:nvSpPr>
+        <p:spPr>
+          <a:xfrm>
+            <a:off x="-45720" y="4626864"/>
+            <a:ext cx="12481560" cy="73152"/>
+          </a:xfrm>
+          <a:prstGeom prst="rect">
+            <a:avLst>
+              <a:gd name="adj" fmla="val 25000"/>
+            </a:avLst>
+          </a:prstGeom>
+          <a:solidFill>
+            <a:srgbClr val="64748B"/>
+          </a:solidFill>
+          <a:ln/>
+        </p:spPr>
+      </p:sp>
+      <p:sp>
+        <p:nvSpPr>
+          <p:cNvPr id="76" name="Shape 74"/>
+          <p:cNvSpPr/>
+          <p:nvPr/>
+        </p:nvSpPr>
+        <p:spPr>
+          <a:xfrm>
+            <a:off x="-45720" y="4663440"/>
+            <a:ext cx="73152" cy="100584"/>
+          </a:xfrm>
+          <a:prstGeom prst="rect">
+            <a:avLst>
+              <a:gd name="adj" fmla="val 25000"/>
+            </a:avLst>
+          </a:prstGeom>
+          <a:solidFill>
+            <a:srgbClr val="64748B"/>
+          </a:solidFill>
+          <a:ln/>
+        </p:spPr>
+      </p:sp>
+      <p:sp>
+        <p:nvSpPr>
+          <p:cNvPr id="77" name="Text 75"/>
+          <p:cNvSpPr/>
+          <p:nvPr/>
+        </p:nvSpPr>
+        <p:spPr>
+          <a:xfrm>
+            <a:off x="-137160" y="4562856"/>
+            <a:ext cx="256032" cy="219456"/>
+          </a:xfrm>
+          <a:prstGeom prst="rect">
+            <a:avLst/>
+          </a:prstGeom>
+          <a:noFill/>
+          <a:ln/>
+        </p:spPr>
+        <p:txBody>
+          <a:bodyPr wrap="square" rtlCol="0" anchor="ctr"/>
+          <a:lstStyle/>
+          <a:p>
+            <a:pPr algn="ctr" indent="0" marL="0">
+              <a:buNone/>
+            </a:pPr>
+            <a:r>
+              <a:rPr lang="en-US" sz="1200" dirty="0">
+                <a:solidFill>
+                  <a:srgbClr val="64748B"/>
+                </a:solidFill>
+                <a:latin typeface="Arial" pitchFamily="34" charset="0"/>
+                <a:ea typeface="Arial" pitchFamily="34" charset="-122"/>
+                <a:cs typeface="Arial" pitchFamily="34" charset="-120"/>
+              </a:rPr>
+              <a:t>▼</a:t>
+            </a:r>
+            <a:endParaRPr lang="en-US" sz="1200" dirty="0"/>
+          </a:p>
+        </p:txBody>
+      </p:sp>
+      <p:sp>
+        <p:nvSpPr>
+          <p:cNvPr id="78" name="Shape 76"/>
+          <p:cNvSpPr/>
+          <p:nvPr/>
+        </p:nvSpPr>
+        <p:spPr>
+          <a:xfrm>
+            <a:off x="182880" y="4800600"/>
+            <a:ext cx="2560320" cy="1417320"/>
+          </a:xfrm>
+          <a:prstGeom prst="rect">
+            <a:avLst>
+              <a:gd name="adj" fmla="val 6452"/>
+            </a:avLst>
+          </a:prstGeom>
+          <a:solidFill>
             <a:srgbClr val="FEF3C7"/>
           </a:solidFill>
-          <a:ln w="19050">
+          <a:ln w="22860">
             <a:solidFill>
               <a:srgbClr val="D97706"/>
             </a:solidFill>
@@ -5731,14 +6490,14 @@
       </p:sp>
       <p:sp>
         <p:nvSpPr>
-          <p:cNvPr id="53" name="Shape 51"/>
-          <p:cNvSpPr/>
-          <p:nvPr/>
-        </p:nvSpPr>
-        <p:spPr>
-          <a:xfrm>
-            <a:off x="347472" y="4553712"/>
-            <a:ext cx="292608" cy="292608"/>
+          <p:cNvPr id="79" name="Shape 77"/>
+          <p:cNvSpPr/>
+          <p:nvPr/>
+        </p:nvSpPr>
+        <p:spPr>
+          <a:xfrm>
+            <a:off x="274320" y="4892040"/>
+            <a:ext cx="274320" cy="274320"/>
           </a:xfrm>
           <a:prstGeom prst="ellipse">
             <a:avLst/>
@@ -5751,14 +6510,14 @@
       </p:sp>
       <p:sp>
         <p:nvSpPr>
-          <p:cNvPr id="54" name="Text 52"/>
-          <p:cNvSpPr/>
-          <p:nvPr/>
-        </p:nvSpPr>
-        <p:spPr>
-          <a:xfrm>
-            <a:off x="347472" y="4553712"/>
-            <a:ext cx="292608" cy="292608"/>
+          <p:cNvPr id="80" name="Text 78"/>
+          <p:cNvSpPr/>
+          <p:nvPr/>
+        </p:nvSpPr>
+        <p:spPr>
+          <a:xfrm>
+            <a:off x="274320" y="4892040"/>
+            <a:ext cx="274320" cy="274320"/>
           </a:xfrm>
           <a:prstGeom prst="rect">
             <a:avLst/>
@@ -5774,7 +6533,7 @@
               <a:buNone/>
             </a:pPr>
             <a:r>
-              <a:rPr lang="en-US" sz="1000" b="1" dirty="0">
+              <a:rPr lang="en-US" sz="1100" b="1" dirty="0">
                 <a:solidFill>
                   <a:srgbClr val="FFFFFF"/>
                 </a:solidFill>
@@ -5784,20 +6543,20 @@
               </a:rPr>
               <a:t>9</a:t>
             </a:r>
-            <a:endParaRPr lang="en-US" sz="1000" dirty="0"/>
-          </a:p>
-        </p:txBody>
-      </p:sp>
-      <p:sp>
-        <p:nvSpPr>
-          <p:cNvPr id="55" name="Text 53"/>
-          <p:cNvSpPr/>
-          <p:nvPr/>
-        </p:nvSpPr>
-        <p:spPr>
-          <a:xfrm>
-            <a:off x="685800" y="4535424"/>
-            <a:ext cx="1965960" cy="320040"/>
+            <a:endParaRPr lang="en-US" sz="1100" dirty="0"/>
+          </a:p>
+        </p:txBody>
+      </p:sp>
+      <p:sp>
+        <p:nvSpPr>
+          <p:cNvPr id="81" name="Text 79"/>
+          <p:cNvSpPr/>
+          <p:nvPr/>
+        </p:nvSpPr>
+        <p:spPr>
+          <a:xfrm>
+            <a:off x="621792" y="4873752"/>
+            <a:ext cx="2029968" cy="292608"/>
           </a:xfrm>
           <a:prstGeom prst="rect">
             <a:avLst/>
@@ -5815,13 +6574,13 @@
             <a:r>
               <a:rPr lang="en-US" sz="1100" b="1" dirty="0">
                 <a:solidFill>
-                  <a:srgbClr val="D97706"/>
-                </a:solidFill>
-                <a:latin typeface="Calibri" pitchFamily="34" charset="0"/>
-                <a:ea typeface="Calibri" pitchFamily="34" charset="-122"/>
-                <a:cs typeface="Calibri" pitchFamily="34" charset="-120"/>
-              </a:rPr>
-              <a:t>Operator Applies Fix</a:t>
+                  <a:srgbClr val="92400E"/>
+                </a:solidFill>
+                <a:latin typeface="Calibri" pitchFamily="34" charset="0"/>
+                <a:ea typeface="Calibri" pitchFamily="34" charset="-122"/>
+                <a:cs typeface="Calibri" pitchFamily="34" charset="-120"/>
+              </a:rPr>
+              <a:t>Approve &amp; Apply Fix</a:t>
             </a:r>
             <a:endParaRPr lang="en-US" sz="1100" dirty="0"/>
           </a:p>
@@ -5829,14 +6588,14 @@
       </p:sp>
       <p:sp>
         <p:nvSpPr>
-          <p:cNvPr id="56" name="Text 54"/>
-          <p:cNvSpPr/>
-          <p:nvPr/>
-        </p:nvSpPr>
-        <p:spPr>
-          <a:xfrm>
-            <a:off x="384048" y="4864608"/>
-            <a:ext cx="2249424" cy="914400"/>
+          <p:cNvPr id="82" name="Text 80"/>
+          <p:cNvSpPr/>
+          <p:nvPr/>
+        </p:nvSpPr>
+        <p:spPr>
+          <a:xfrm>
+            <a:off x="292608" y="5202936"/>
+            <a:ext cx="2340864" cy="941832"/>
           </a:xfrm>
           <a:prstGeom prst="rect">
             <a:avLst/>
@@ -5850,7 +6609,7 @@
           <a:p>
             <a:pPr indent="0" marL="0">
               <a:lnSpc>
-                <a:spcPct val="115000"/>
+                <a:spcPct val="120000"/>
               </a:lnSpc>
               <a:buNone/>
             </a:pPr>
@@ -5863,14 +6622,14 @@
                 <a:ea typeface="Calibri" pitchFamily="34" charset="-122"/>
                 <a:cs typeface="Calibri" pitchFamily="34" charset="-120"/>
               </a:rPr>
-              <a:t>Click 'Apply Fix'</a:t>
+              <a:t>Click “Apply Fix”</a:t>
             </a:r>
             <a:endParaRPr lang="en-US" sz="850" dirty="0"/>
           </a:p>
           <a:p>
             <a:pPr indent="0" marL="0">
               <a:lnSpc>
-                <a:spcPct val="115000"/>
+                <a:spcPct val="120000"/>
               </a:lnSpc>
               <a:buNone/>
             </a:pPr>
@@ -5890,7 +6649,7 @@
           <a:p>
             <a:pPr indent="0" marL="0">
               <a:lnSpc>
-                <a:spcPct val="115000"/>
+                <a:spcPct val="120000"/>
               </a:lnSpc>
               <a:buNone/>
             </a:pPr>
@@ -5910,7 +6669,7 @@
           <a:p>
             <a:pPr indent="0" marL="0">
               <a:lnSpc>
-                <a:spcPct val="115000"/>
+                <a:spcPct val="120000"/>
               </a:lnSpc>
               <a:buNone/>
             </a:pPr>
@@ -5923,7 +6682,7 @@
                 <a:ea typeface="Calibri" pitchFamily="34" charset="-122"/>
                 <a:cs typeface="Calibri" pitchFamily="34" charset="-120"/>
               </a:rPr>
-              <a:t>Rollout initiated</a:t>
+              <a:t>Rolling update initiated</a:t>
             </a:r>
             <a:endParaRPr lang="en-US" sz="850" dirty="0"/>
           </a:p>
@@ -5931,24 +6690,24 @@
       </p:sp>
       <p:sp>
         <p:nvSpPr>
-          <p:cNvPr id="57" name="Shape 55"/>
-          <p:cNvSpPr/>
-          <p:nvPr/>
-        </p:nvSpPr>
-        <p:spPr>
-          <a:xfrm>
-            <a:off x="3017520" y="4480560"/>
-            <a:ext cx="2468880" cy="1371600"/>
+          <p:cNvPr id="83" name="Shape 81"/>
+          <p:cNvSpPr/>
+          <p:nvPr/>
+        </p:nvSpPr>
+        <p:spPr>
+          <a:xfrm>
+            <a:off x="3154680" y="4800600"/>
+            <a:ext cx="2560320" cy="1417320"/>
           </a:xfrm>
           <a:prstGeom prst="rect">
             <a:avLst>
-              <a:gd name="adj" fmla="val 6667"/>
+              <a:gd name="adj" fmla="val 6452"/>
             </a:avLst>
           </a:prstGeom>
           <a:solidFill>
             <a:srgbClr val="CFFAFE"/>
           </a:solidFill>
-          <a:ln w="19050">
+          <a:ln w="22860">
             <a:solidFill>
               <a:srgbClr val="0891B2"/>
             </a:solidFill>
@@ -5958,14 +6717,14 @@
       </p:sp>
       <p:sp>
         <p:nvSpPr>
-          <p:cNvPr id="58" name="Shape 56"/>
-          <p:cNvSpPr/>
-          <p:nvPr/>
-        </p:nvSpPr>
-        <p:spPr>
-          <a:xfrm>
-            <a:off x="3090672" y="4553712"/>
-            <a:ext cx="292608" cy="292608"/>
+          <p:cNvPr id="84" name="Shape 82"/>
+          <p:cNvSpPr/>
+          <p:nvPr/>
+        </p:nvSpPr>
+        <p:spPr>
+          <a:xfrm>
+            <a:off x="3246120" y="4892040"/>
+            <a:ext cx="274320" cy="274320"/>
           </a:xfrm>
           <a:prstGeom prst="ellipse">
             <a:avLst/>
@@ -5978,14 +6737,14 @@
       </p:sp>
       <p:sp>
         <p:nvSpPr>
-          <p:cNvPr id="59" name="Text 57"/>
-          <p:cNvSpPr/>
-          <p:nvPr/>
-        </p:nvSpPr>
-        <p:spPr>
-          <a:xfrm>
-            <a:off x="3090672" y="4553712"/>
-            <a:ext cx="292608" cy="292608"/>
+          <p:cNvPr id="85" name="Text 83"/>
+          <p:cNvSpPr/>
+          <p:nvPr/>
+        </p:nvSpPr>
+        <p:spPr>
+          <a:xfrm>
+            <a:off x="3246120" y="4892040"/>
+            <a:ext cx="274320" cy="274320"/>
           </a:xfrm>
           <a:prstGeom prst="rect">
             <a:avLst/>
@@ -6001,7 +6760,7 @@
               <a:buNone/>
             </a:pPr>
             <a:r>
-              <a:rPr lang="en-US" sz="1000" b="1" dirty="0">
+              <a:rPr lang="en-US" sz="1100" b="1" dirty="0">
                 <a:solidFill>
                   <a:srgbClr val="FFFFFF"/>
                 </a:solidFill>
@@ -6011,20 +6770,20 @@
               </a:rPr>
               <a:t>10</a:t>
             </a:r>
-            <a:endParaRPr lang="en-US" sz="1000" dirty="0"/>
-          </a:p>
-        </p:txBody>
-      </p:sp>
-      <p:sp>
-        <p:nvSpPr>
-          <p:cNvPr id="60" name="Text 58"/>
-          <p:cNvSpPr/>
-          <p:nvPr/>
-        </p:nvSpPr>
-        <p:spPr>
-          <a:xfrm>
-            <a:off x="3429000" y="4535424"/>
-            <a:ext cx="1965960" cy="320040"/>
+            <a:endParaRPr lang="en-US" sz="1100" dirty="0"/>
+          </a:p>
+        </p:txBody>
+      </p:sp>
+      <p:sp>
+        <p:nvSpPr>
+          <p:cNvPr id="86" name="Text 84"/>
+          <p:cNvSpPr/>
+          <p:nvPr/>
+        </p:nvSpPr>
+        <p:spPr>
+          <a:xfrm>
+            <a:off x="3593592" y="4873752"/>
+            <a:ext cx="2029968" cy="292608"/>
           </a:xfrm>
           <a:prstGeom prst="rect">
             <a:avLst/>
@@ -6042,7 +6801,7 @@
             <a:r>
               <a:rPr lang="en-US" sz="1100" b="1" dirty="0">
                 <a:solidFill>
-                  <a:srgbClr val="0891B2"/>
+                  <a:srgbClr val="155E75"/>
                 </a:solidFill>
                 <a:latin typeface="Calibri" pitchFamily="34" charset="0"/>
                 <a:ea typeface="Calibri" pitchFamily="34" charset="-122"/>
@@ -6056,14 +6815,14 @@
       </p:sp>
       <p:sp>
         <p:nvSpPr>
-          <p:cNvPr id="61" name="Text 59"/>
-          <p:cNvSpPr/>
-          <p:nvPr/>
-        </p:nvSpPr>
-        <p:spPr>
-          <a:xfrm>
-            <a:off x="3127248" y="4864608"/>
-            <a:ext cx="2249424" cy="914400"/>
+          <p:cNvPr id="87" name="Text 85"/>
+          <p:cNvSpPr/>
+          <p:nvPr/>
+        </p:nvSpPr>
+        <p:spPr>
+          <a:xfrm>
+            <a:off x="3264408" y="5202936"/>
+            <a:ext cx="2340864" cy="941832"/>
           </a:xfrm>
           <a:prstGeom prst="rect">
             <a:avLst/>
@@ -6077,7 +6836,7 @@
           <a:p>
             <a:pPr indent="0" marL="0">
               <a:lnSpc>
-                <a:spcPct val="115000"/>
+                <a:spcPct val="120000"/>
               </a:lnSpc>
               <a:buNone/>
             </a:pPr>
@@ -6097,7 +6856,7 @@
           <a:p>
             <a:pPr indent="0" marL="0">
               <a:lnSpc>
-                <a:spcPct val="115000"/>
+                <a:spcPct val="120000"/>
               </a:lnSpc>
               <a:buNone/>
             </a:pPr>
@@ -6117,7 +6876,7 @@
           <a:p>
             <a:pPr indent="0" marL="0">
               <a:lnSpc>
-                <a:spcPct val="115000"/>
+                <a:spcPct val="120000"/>
               </a:lnSpc>
               <a:buNone/>
             </a:pPr>
@@ -6137,7 +6896,7 @@
           <a:p>
             <a:pPr indent="0" marL="0">
               <a:lnSpc>
-                <a:spcPct val="115000"/>
+                <a:spcPct val="120000"/>
               </a:lnSpc>
               <a:buNone/>
             </a:pPr>
@@ -6158,24 +6917,24 @@
       </p:sp>
       <p:sp>
         <p:nvSpPr>
-          <p:cNvPr id="62" name="Shape 60"/>
-          <p:cNvSpPr/>
-          <p:nvPr/>
-        </p:nvSpPr>
-        <p:spPr>
-          <a:xfrm>
-            <a:off x="5760720" y="4480560"/>
-            <a:ext cx="2834640" cy="1371600"/>
+          <p:cNvPr id="88" name="Shape 86"/>
+          <p:cNvSpPr/>
+          <p:nvPr/>
+        </p:nvSpPr>
+        <p:spPr>
+          <a:xfrm>
+            <a:off x="6126480" y="4800600"/>
+            <a:ext cx="2743200" cy="1417320"/>
           </a:xfrm>
           <a:prstGeom prst="rect">
             <a:avLst>
-              <a:gd name="adj" fmla="val 6667"/>
+              <a:gd name="adj" fmla="val 6452"/>
             </a:avLst>
           </a:prstGeom>
           <a:solidFill>
             <a:srgbClr val="D1FAE5"/>
           </a:solidFill>
-          <a:ln w="19050">
+          <a:ln w="22860">
             <a:solidFill>
               <a:srgbClr val="059669"/>
             </a:solidFill>
@@ -6185,14 +6944,14 @@
       </p:sp>
       <p:sp>
         <p:nvSpPr>
-          <p:cNvPr id="63" name="Shape 61"/>
-          <p:cNvSpPr/>
-          <p:nvPr/>
-        </p:nvSpPr>
-        <p:spPr>
-          <a:xfrm>
-            <a:off x="5833872" y="4553712"/>
-            <a:ext cx="292608" cy="292608"/>
+          <p:cNvPr id="89" name="Shape 87"/>
+          <p:cNvSpPr/>
+          <p:nvPr/>
+        </p:nvSpPr>
+        <p:spPr>
+          <a:xfrm>
+            <a:off x="6217920" y="4892040"/>
+            <a:ext cx="274320" cy="274320"/>
           </a:xfrm>
           <a:prstGeom prst="ellipse">
             <a:avLst/>
@@ -6205,14 +6964,14 @@
       </p:sp>
       <p:sp>
         <p:nvSpPr>
-          <p:cNvPr id="64" name="Text 62"/>
-          <p:cNvSpPr/>
-          <p:nvPr/>
-        </p:nvSpPr>
-        <p:spPr>
-          <a:xfrm>
-            <a:off x="5833872" y="4553712"/>
-            <a:ext cx="292608" cy="292608"/>
+          <p:cNvPr id="90" name="Text 88"/>
+          <p:cNvSpPr/>
+          <p:nvPr/>
+        </p:nvSpPr>
+        <p:spPr>
+          <a:xfrm>
+            <a:off x="6217920" y="4892040"/>
+            <a:ext cx="274320" cy="274320"/>
           </a:xfrm>
           <a:prstGeom prst="rect">
             <a:avLst/>
@@ -6228,7 +6987,7 @@
               <a:buNone/>
             </a:pPr>
             <a:r>
-              <a:rPr lang="en-US" sz="1000" b="1" dirty="0">
+              <a:rPr lang="en-US" sz="1100" b="1" dirty="0">
                 <a:solidFill>
                   <a:srgbClr val="FFFFFF"/>
                 </a:solidFill>
@@ -6238,20 +6997,20 @@
               </a:rPr>
               <a:t>11</a:t>
             </a:r>
-            <a:endParaRPr lang="en-US" sz="1000" dirty="0"/>
-          </a:p>
-        </p:txBody>
-      </p:sp>
-      <p:sp>
-        <p:nvSpPr>
-          <p:cNvPr id="65" name="Text 63"/>
-          <p:cNvSpPr/>
-          <p:nvPr/>
-        </p:nvSpPr>
-        <p:spPr>
-          <a:xfrm>
-            <a:off x="6172200" y="4535424"/>
-            <a:ext cx="2331720" cy="320040"/>
+            <a:endParaRPr lang="en-US" sz="1100" dirty="0"/>
+          </a:p>
+        </p:txBody>
+      </p:sp>
+      <p:sp>
+        <p:nvSpPr>
+          <p:cNvPr id="91" name="Text 89"/>
+          <p:cNvSpPr/>
+          <p:nvPr/>
+        </p:nvSpPr>
+        <p:spPr>
+          <a:xfrm>
+            <a:off x="6565392" y="4873752"/>
+            <a:ext cx="2212848" cy="292608"/>
           </a:xfrm>
           <a:prstGeom prst="rect">
             <a:avLst/>
@@ -6269,7 +7028,7 @@
             <a:r>
               <a:rPr lang="en-US" sz="1100" b="1" dirty="0">
                 <a:solidFill>
-                  <a:srgbClr val="059669"/>
+                  <a:srgbClr val="065F46"/>
                 </a:solidFill>
                 <a:latin typeface="Calibri" pitchFamily="34" charset="0"/>
                 <a:ea typeface="Calibri" pitchFamily="34" charset="-122"/>
@@ -6283,14 +7042,14 @@
       </p:sp>
       <p:sp>
         <p:nvSpPr>
-          <p:cNvPr id="66" name="Text 64"/>
-          <p:cNvSpPr/>
-          <p:nvPr/>
-        </p:nvSpPr>
-        <p:spPr>
-          <a:xfrm>
-            <a:off x="5870448" y="4864608"/>
-            <a:ext cx="2615184" cy="914400"/>
+          <p:cNvPr id="92" name="Text 90"/>
+          <p:cNvSpPr/>
+          <p:nvPr/>
+        </p:nvSpPr>
+        <p:spPr>
+          <a:xfrm>
+            <a:off x="6236208" y="5202936"/>
+            <a:ext cx="2523744" cy="941832"/>
           </a:xfrm>
           <a:prstGeom prst="rect">
             <a:avLst/>
@@ -6304,7 +7063,7 @@
           <a:p>
             <a:pPr indent="0" marL="0">
               <a:lnSpc>
-                <a:spcPct val="115000"/>
+                <a:spcPct val="120000"/>
               </a:lnSpc>
               <a:buNone/>
             </a:pPr>
@@ -6324,7 +7083,7 @@
           <a:p>
             <a:pPr indent="0" marL="0">
               <a:lnSpc>
-                <a:spcPct val="115000"/>
+                <a:spcPct val="120000"/>
               </a:lnSpc>
               <a:buNone/>
             </a:pPr>
@@ -6344,7 +7103,7 @@
           <a:p>
             <a:pPr indent="0" marL="0">
               <a:lnSpc>
-                <a:spcPct val="115000"/>
+                <a:spcPct val="120000"/>
               </a:lnSpc>
               <a:buNone/>
             </a:pPr>
@@ -6364,7 +7123,7 @@
           <a:p>
             <a:pPr indent="0" marL="0">
               <a:lnSpc>
-                <a:spcPct val="115000"/>
+                <a:spcPct val="120000"/>
               </a:lnSpc>
               <a:buNone/>
             </a:pPr>
@@ -6385,24 +7144,24 @@
       </p:sp>
       <p:sp>
         <p:nvSpPr>
-          <p:cNvPr id="67" name="Shape 65"/>
-          <p:cNvSpPr/>
-          <p:nvPr/>
-        </p:nvSpPr>
-        <p:spPr>
-          <a:xfrm>
-            <a:off x="8869680" y="4480560"/>
-            <a:ext cx="3017520" cy="1371600"/>
+          <p:cNvPr id="93" name="Shape 91"/>
+          <p:cNvSpPr/>
+          <p:nvPr/>
+        </p:nvSpPr>
+        <p:spPr>
+          <a:xfrm>
+            <a:off x="9281160" y="4800600"/>
+            <a:ext cx="2697480" cy="1417320"/>
           </a:xfrm>
           <a:prstGeom prst="rect">
             <a:avLst>
-              <a:gd name="adj" fmla="val 6667"/>
+              <a:gd name="adj" fmla="val 6452"/>
             </a:avLst>
           </a:prstGeom>
           <a:solidFill>
             <a:srgbClr val="D1FAE5"/>
           </a:solidFill>
-          <a:ln w="19050">
+          <a:ln w="22860">
             <a:solidFill>
               <a:srgbClr val="059669"/>
             </a:solidFill>
@@ -6412,14 +7171,14 @@
       </p:sp>
       <p:sp>
         <p:nvSpPr>
-          <p:cNvPr id="68" name="Shape 66"/>
-          <p:cNvSpPr/>
-          <p:nvPr/>
-        </p:nvSpPr>
-        <p:spPr>
-          <a:xfrm>
-            <a:off x="8942832" y="4553712"/>
-            <a:ext cx="292608" cy="292608"/>
+          <p:cNvPr id="94" name="Shape 92"/>
+          <p:cNvSpPr/>
+          <p:nvPr/>
+        </p:nvSpPr>
+        <p:spPr>
+          <a:xfrm>
+            <a:off x="9372600" y="4892040"/>
+            <a:ext cx="274320" cy="274320"/>
           </a:xfrm>
           <a:prstGeom prst="ellipse">
             <a:avLst/>
@@ -6432,14 +7191,14 @@
       </p:sp>
       <p:sp>
         <p:nvSpPr>
-          <p:cNvPr id="69" name="Text 67"/>
-          <p:cNvSpPr/>
-          <p:nvPr/>
-        </p:nvSpPr>
-        <p:spPr>
-          <a:xfrm>
-            <a:off x="8942832" y="4553712"/>
-            <a:ext cx="292608" cy="292608"/>
+          <p:cNvPr id="95" name="Text 93"/>
+          <p:cNvSpPr/>
+          <p:nvPr/>
+        </p:nvSpPr>
+        <p:spPr>
+          <a:xfrm>
+            <a:off x="9372600" y="4892040"/>
+            <a:ext cx="274320" cy="274320"/>
           </a:xfrm>
           <a:prstGeom prst="rect">
             <a:avLst/>
@@ -6455,7 +7214,7 @@
               <a:buNone/>
             </a:pPr>
             <a:r>
-              <a:rPr lang="en-US" sz="1000" b="1" dirty="0">
+              <a:rPr lang="en-US" sz="1100" b="1" dirty="0">
                 <a:solidFill>
                   <a:srgbClr val="FFFFFF"/>
                 </a:solidFill>
@@ -6465,20 +7224,20 @@
               </a:rPr>
               <a:t>12</a:t>
             </a:r>
-            <a:endParaRPr lang="en-US" sz="1000" dirty="0"/>
-          </a:p>
-        </p:txBody>
-      </p:sp>
-      <p:sp>
-        <p:nvSpPr>
-          <p:cNvPr id="70" name="Text 68"/>
-          <p:cNvSpPr/>
-          <p:nvPr/>
-        </p:nvSpPr>
-        <p:spPr>
-          <a:xfrm>
-            <a:off x="9281160" y="4535424"/>
-            <a:ext cx="2514600" cy="320040"/>
+            <a:endParaRPr lang="en-US" sz="1100" dirty="0"/>
+          </a:p>
+        </p:txBody>
+      </p:sp>
+      <p:sp>
+        <p:nvSpPr>
+          <p:cNvPr id="96" name="Text 94"/>
+          <p:cNvSpPr/>
+          <p:nvPr/>
+        </p:nvSpPr>
+        <p:spPr>
+          <a:xfrm>
+            <a:off x="9720072" y="4873752"/>
+            <a:ext cx="2167128" cy="292608"/>
           </a:xfrm>
           <a:prstGeom prst="rect">
             <a:avLst/>
@@ -6496,7 +7255,7 @@
             <a:r>
               <a:rPr lang="en-US" sz="1100" b="1" dirty="0">
                 <a:solidFill>
-                  <a:srgbClr val="059669"/>
+                  <a:srgbClr val="065F46"/>
                 </a:solidFill>
                 <a:latin typeface="Calibri" pitchFamily="34" charset="0"/>
                 <a:ea typeface="Calibri" pitchFamily="34" charset="-122"/>
@@ -6510,14 +7269,14 @@
       </p:sp>
       <p:sp>
         <p:nvSpPr>
-          <p:cNvPr id="71" name="Text 69"/>
-          <p:cNvSpPr/>
-          <p:nvPr/>
-        </p:nvSpPr>
-        <p:spPr>
-          <a:xfrm>
-            <a:off x="8979408" y="4864608"/>
-            <a:ext cx="2798064" cy="914400"/>
+          <p:cNvPr id="97" name="Text 95"/>
+          <p:cNvSpPr/>
+          <p:nvPr/>
+        </p:nvSpPr>
+        <p:spPr>
+          <a:xfrm>
+            <a:off x="9390888" y="5202936"/>
+            <a:ext cx="2478024" cy="941832"/>
           </a:xfrm>
           <a:prstGeom prst="rect">
             <a:avLst/>
@@ -6531,7 +7290,7 @@
           <a:p>
             <a:pPr indent="0" marL="0">
               <a:lnSpc>
-                <a:spcPct val="115000"/>
+                <a:spcPct val="120000"/>
               </a:lnSpc>
               <a:buNone/>
             </a:pPr>
@@ -6551,7 +7310,7 @@
           <a:p>
             <a:pPr indent="0" marL="0">
               <a:lnSpc>
-                <a:spcPct val="115000"/>
+                <a:spcPct val="120000"/>
               </a:lnSpc>
               <a:buNone/>
             </a:pPr>
@@ -6564,14 +7323,14 @@
                 <a:ea typeface="Calibri" pitchFamily="34" charset="-122"/>
                 <a:cs typeface="Calibri" pitchFamily="34" charset="-120"/>
               </a:rPr>
-              <a:t>Work notes: before/after + timeline</a:t>
+              <a:t>Work notes: before/after</a:t>
             </a:r>
             <a:endParaRPr lang="en-US" sz="850" dirty="0"/>
           </a:p>
           <a:p>
             <a:pPr indent="0" marL="0">
               <a:lnSpc>
-                <a:spcPct val="115000"/>
+                <a:spcPct val="120000"/>
               </a:lnSpc>
               <a:buNone/>
             </a:pPr>
@@ -6591,7 +7350,7 @@
           <a:p>
             <a:pPr indent="0" marL="0">
               <a:lnSpc>
-                <a:spcPct val="115000"/>
+                <a:spcPct val="120000"/>
               </a:lnSpc>
               <a:buNone/>
             </a:pPr>
@@ -6604,7 +7363,7 @@
                 <a:ea typeface="Calibri" pitchFamily="34" charset="-122"/>
                 <a:cs typeface="Calibri" pitchFamily="34" charset="-120"/>
               </a:rPr>
-              <a:t>State persisted to localStorage</a:t>
+              <a:t>State persisted to storage</a:t>
             </a:r>
             <a:endParaRPr lang="en-US" sz="850" dirty="0"/>
           </a:p>
@@ -6612,379 +7371,204 @@
       </p:sp>
       <p:sp>
         <p:nvSpPr>
-          <p:cNvPr id="72" name="Shape 70"/>
-          <p:cNvSpPr/>
-          <p:nvPr/>
-        </p:nvSpPr>
-        <p:spPr>
-          <a:xfrm>
-            <a:off x="2743200" y="1691640"/>
-            <a:ext cx="914400" cy="914400"/>
-          </a:xfrm>
-          <a:prstGeom prst="line">
-            <a:avLst/>
-          </a:prstGeom>
-          <a:noFill/>
-          <a:ln w="19050">
-            <a:solidFill>
-              <a:srgbClr val="94A3B8"/>
-            </a:solidFill>
-            <a:prstDash val="solid"/>
-            <a:headEnd type="arrow"/>
-          </a:ln>
-        </p:spPr>
-      </p:sp>
-      <p:sp>
-        <p:nvSpPr>
-          <p:cNvPr id="73" name="Shape 71"/>
-          <p:cNvSpPr/>
-          <p:nvPr/>
-        </p:nvSpPr>
-        <p:spPr>
-          <a:xfrm>
-            <a:off x="5486400" y="1691640"/>
-            <a:ext cx="914400" cy="914400"/>
-          </a:xfrm>
-          <a:prstGeom prst="line">
-            <a:avLst/>
-          </a:prstGeom>
-          <a:noFill/>
-          <a:ln w="19050">
-            <a:solidFill>
-              <a:srgbClr val="94A3B8"/>
-            </a:solidFill>
-            <a:prstDash val="solid"/>
-            <a:headEnd type="arrow"/>
-          </a:ln>
-        </p:spPr>
-      </p:sp>
-      <p:sp>
-        <p:nvSpPr>
-          <p:cNvPr id="74" name="Shape 72"/>
-          <p:cNvSpPr/>
-          <p:nvPr/>
-        </p:nvSpPr>
-        <p:spPr>
-          <a:xfrm>
-            <a:off x="7772400" y="1691640"/>
-            <a:ext cx="914400" cy="914400"/>
-          </a:xfrm>
-          <a:prstGeom prst="line">
-            <a:avLst/>
-          </a:prstGeom>
-          <a:noFill/>
-          <a:ln w="19050">
-            <a:solidFill>
-              <a:srgbClr val="94A3B8"/>
-            </a:solidFill>
-            <a:prstDash val="solid"/>
-            <a:headEnd type="arrow"/>
-          </a:ln>
-        </p:spPr>
-      </p:sp>
-      <p:sp>
-        <p:nvSpPr>
-          <p:cNvPr id="75" name="Shape 73"/>
-          <p:cNvSpPr/>
-          <p:nvPr/>
-        </p:nvSpPr>
-        <p:spPr>
-          <a:xfrm>
-            <a:off x="9829800" y="2377440"/>
-            <a:ext cx="914400" cy="914400"/>
-          </a:xfrm>
-          <a:prstGeom prst="line">
-            <a:avLst/>
-          </a:prstGeom>
-          <a:noFill/>
-          <a:ln w="19050">
-            <a:solidFill>
-              <a:srgbClr val="94A3B8"/>
-            </a:solidFill>
-            <a:prstDash val="solid"/>
-            <a:headEnd type="arrow"/>
-          </a:ln>
-        </p:spPr>
-      </p:sp>
-      <p:sp>
-        <p:nvSpPr>
-          <p:cNvPr id="76" name="Shape 74"/>
-          <p:cNvSpPr/>
-          <p:nvPr/>
-        </p:nvSpPr>
-        <p:spPr>
-          <a:xfrm>
-            <a:off x="9829800" y="2514600"/>
-            <a:ext cx="914400" cy="914400"/>
-          </a:xfrm>
-          <a:prstGeom prst="line">
-            <a:avLst/>
-          </a:prstGeom>
-          <a:noFill/>
-          <a:ln w="19050">
-            <a:solidFill>
-              <a:srgbClr val="94A3B8"/>
-            </a:solidFill>
-            <a:prstDash val="solid"/>
-          </a:ln>
-        </p:spPr>
-      </p:sp>
-      <p:sp>
-        <p:nvSpPr>
-          <p:cNvPr id="77" name="Shape 75"/>
-          <p:cNvSpPr/>
-          <p:nvPr/>
-        </p:nvSpPr>
-        <p:spPr>
-          <a:xfrm>
-            <a:off x="548640" y="2514600"/>
-            <a:ext cx="914400" cy="914400"/>
-          </a:xfrm>
-          <a:prstGeom prst="line">
-            <a:avLst/>
-          </a:prstGeom>
-          <a:noFill/>
-          <a:ln w="19050">
-            <a:solidFill>
-              <a:srgbClr val="94A3B8"/>
-            </a:solidFill>
-            <a:prstDash val="solid"/>
-            <a:headEnd type="arrow"/>
-          </a:ln>
-        </p:spPr>
-      </p:sp>
-      <p:sp>
-        <p:nvSpPr>
-          <p:cNvPr id="78" name="Shape 76"/>
-          <p:cNvSpPr/>
-          <p:nvPr/>
-        </p:nvSpPr>
-        <p:spPr>
-          <a:xfrm>
-            <a:off x="3291840" y="3429000"/>
-            <a:ext cx="914400" cy="914400"/>
-          </a:xfrm>
-          <a:prstGeom prst="line">
-            <a:avLst/>
-          </a:prstGeom>
-          <a:noFill/>
-          <a:ln w="19050">
-            <a:solidFill>
-              <a:srgbClr val="94A3B8"/>
-            </a:solidFill>
-            <a:prstDash val="solid"/>
-            <a:headEnd type="arrow"/>
-          </a:ln>
-        </p:spPr>
-      </p:sp>
-      <p:sp>
-        <p:nvSpPr>
-          <p:cNvPr id="79" name="Shape 77"/>
-          <p:cNvSpPr/>
-          <p:nvPr/>
-        </p:nvSpPr>
-        <p:spPr>
-          <a:xfrm>
-            <a:off x="6035040" y="3429000"/>
-            <a:ext cx="914400" cy="914400"/>
-          </a:xfrm>
-          <a:prstGeom prst="line">
-            <a:avLst/>
-          </a:prstGeom>
-          <a:noFill/>
-          <a:ln w="19050">
-            <a:solidFill>
-              <a:srgbClr val="94A3B8"/>
-            </a:solidFill>
-            <a:prstDash val="solid"/>
-            <a:headEnd type="arrow"/>
-          </a:ln>
-        </p:spPr>
-      </p:sp>
-      <p:sp>
-        <p:nvSpPr>
-          <p:cNvPr id="80" name="Shape 78"/>
-          <p:cNvSpPr/>
-          <p:nvPr/>
-        </p:nvSpPr>
-        <p:spPr>
-          <a:xfrm>
-            <a:off x="8778240" y="3429000"/>
-            <a:ext cx="914400" cy="914400"/>
-          </a:xfrm>
-          <a:prstGeom prst="line">
-            <a:avLst/>
-          </a:prstGeom>
-          <a:noFill/>
-          <a:ln w="19050">
-            <a:solidFill>
-              <a:srgbClr val="94A3B8"/>
-            </a:solidFill>
-            <a:prstDash val="solid"/>
-            <a:headEnd type="arrow"/>
-          </a:ln>
-        </p:spPr>
-      </p:sp>
-      <p:sp>
-        <p:nvSpPr>
-          <p:cNvPr id="81" name="Shape 79"/>
-          <p:cNvSpPr/>
-          <p:nvPr/>
-        </p:nvSpPr>
-        <p:spPr>
-          <a:xfrm>
-            <a:off x="10469880" y="4114800"/>
-            <a:ext cx="914400" cy="914400"/>
-          </a:xfrm>
-          <a:prstGeom prst="line">
-            <a:avLst/>
-          </a:prstGeom>
-          <a:noFill/>
-          <a:ln w="19050">
-            <a:solidFill>
-              <a:srgbClr val="94A3B8"/>
-            </a:solidFill>
-            <a:prstDash val="solid"/>
-            <a:headEnd type="arrow"/>
-          </a:ln>
-        </p:spPr>
-      </p:sp>
-      <p:sp>
-        <p:nvSpPr>
-          <p:cNvPr id="82" name="Shape 80"/>
-          <p:cNvSpPr/>
-          <p:nvPr/>
-        </p:nvSpPr>
-        <p:spPr>
-          <a:xfrm>
-            <a:off x="10469880" y="4251960"/>
-            <a:ext cx="914400" cy="914400"/>
-          </a:xfrm>
-          <a:prstGeom prst="line">
-            <a:avLst/>
-          </a:prstGeom>
-          <a:noFill/>
-          <a:ln w="19050">
-            <a:solidFill>
-              <a:srgbClr val="94A3B8"/>
-            </a:solidFill>
-            <a:prstDash val="solid"/>
-          </a:ln>
-        </p:spPr>
-      </p:sp>
-      <p:sp>
-        <p:nvSpPr>
-          <p:cNvPr id="83" name="Shape 81"/>
-          <p:cNvSpPr/>
-          <p:nvPr/>
-        </p:nvSpPr>
-        <p:spPr>
-          <a:xfrm>
-            <a:off x="548640" y="4251960"/>
-            <a:ext cx="914400" cy="914400"/>
-          </a:xfrm>
-          <a:prstGeom prst="line">
-            <a:avLst/>
-          </a:prstGeom>
-          <a:noFill/>
-          <a:ln w="19050">
-            <a:solidFill>
-              <a:srgbClr val="94A3B8"/>
-            </a:solidFill>
-            <a:prstDash val="solid"/>
-            <a:headEnd type="arrow"/>
-          </a:ln>
-        </p:spPr>
-      </p:sp>
-      <p:sp>
-        <p:nvSpPr>
-          <p:cNvPr id="84" name="Shape 82"/>
-          <p:cNvSpPr/>
-          <p:nvPr/>
-        </p:nvSpPr>
-        <p:spPr>
-          <a:xfrm>
-            <a:off x="2743200" y="5166360"/>
-            <a:ext cx="914400" cy="914400"/>
-          </a:xfrm>
-          <a:prstGeom prst="line">
-            <a:avLst/>
-          </a:prstGeom>
-          <a:noFill/>
-          <a:ln w="19050">
-            <a:solidFill>
-              <a:srgbClr val="94A3B8"/>
-            </a:solidFill>
-            <a:prstDash val="solid"/>
-            <a:headEnd type="arrow"/>
-          </a:ln>
-        </p:spPr>
-      </p:sp>
-      <p:sp>
-        <p:nvSpPr>
-          <p:cNvPr id="85" name="Shape 83"/>
-          <p:cNvSpPr/>
-          <p:nvPr/>
-        </p:nvSpPr>
-        <p:spPr>
-          <a:xfrm>
-            <a:off x="5486400" y="5166360"/>
-            <a:ext cx="914400" cy="914400"/>
-          </a:xfrm>
-          <a:prstGeom prst="line">
-            <a:avLst/>
-          </a:prstGeom>
-          <a:noFill/>
-          <a:ln w="19050">
-            <a:solidFill>
-              <a:srgbClr val="94A3B8"/>
-            </a:solidFill>
-            <a:prstDash val="solid"/>
-            <a:headEnd type="arrow"/>
-          </a:ln>
-        </p:spPr>
-      </p:sp>
-      <p:sp>
-        <p:nvSpPr>
-          <p:cNvPr id="86" name="Shape 84"/>
-          <p:cNvSpPr/>
-          <p:nvPr/>
-        </p:nvSpPr>
-        <p:spPr>
-          <a:xfrm>
-            <a:off x="8595360" y="5166360"/>
-            <a:ext cx="914400" cy="914400"/>
-          </a:xfrm>
-          <a:prstGeom prst="line">
-            <a:avLst/>
-          </a:prstGeom>
-          <a:noFill/>
-          <a:ln w="19050">
-            <a:solidFill>
-              <a:srgbClr val="94A3B8"/>
-            </a:solidFill>
-            <a:prstDash val="solid"/>
-            <a:headEnd type="arrow"/>
-          </a:ln>
-        </p:spPr>
-      </p:sp>
-      <p:sp>
-        <p:nvSpPr>
-          <p:cNvPr id="87" name="Shape 85"/>
-          <p:cNvSpPr/>
-          <p:nvPr/>
-        </p:nvSpPr>
-        <p:spPr>
-          <a:xfrm>
-            <a:off x="274320" y="6126480"/>
-            <a:ext cx="11612880" cy="457200"/>
+          <p:cNvPr id="98" name="Shape 96"/>
+          <p:cNvSpPr/>
+          <p:nvPr/>
+        </p:nvSpPr>
+        <p:spPr>
+          <a:xfrm>
+            <a:off x="2761488" y="5472684"/>
+            <a:ext cx="246888" cy="73152"/>
           </a:xfrm>
           <a:prstGeom prst="rect">
             <a:avLst>
-              <a:gd name="adj" fmla="val 16000"/>
+              <a:gd name="adj" fmla="val 25000"/>
             </a:avLst>
           </a:prstGeom>
           <a:solidFill>
+            <a:srgbClr val="64748B"/>
+          </a:solidFill>
+          <a:ln/>
+        </p:spPr>
+      </p:sp>
+      <p:sp>
+        <p:nvSpPr>
+          <p:cNvPr id="99" name="Text 97"/>
+          <p:cNvSpPr/>
+          <p:nvPr/>
+        </p:nvSpPr>
+        <p:spPr>
+          <a:xfrm>
+            <a:off x="2971800" y="5381244"/>
+            <a:ext cx="219456" cy="256032"/>
+          </a:xfrm>
+          <a:prstGeom prst="rect">
+            <a:avLst/>
+          </a:prstGeom>
+          <a:noFill/>
+          <a:ln/>
+        </p:spPr>
+        <p:txBody>
+          <a:bodyPr wrap="square" rtlCol="0" anchor="ctr"/>
+          <a:lstStyle/>
+          <a:p>
+            <a:pPr algn="ctr" indent="0" marL="0">
+              <a:buNone/>
+            </a:pPr>
+            <a:r>
+              <a:rPr lang="en-US" sz="1400" dirty="0">
+                <a:solidFill>
+                  <a:srgbClr val="64748B"/>
+                </a:solidFill>
+                <a:latin typeface="Arial" pitchFamily="34" charset="0"/>
+                <a:ea typeface="Arial" pitchFamily="34" charset="-122"/>
+                <a:cs typeface="Arial" pitchFamily="34" charset="-120"/>
+              </a:rPr>
+              <a:t>▶</a:t>
+            </a:r>
+            <a:endParaRPr lang="en-US" sz="1400" dirty="0"/>
+          </a:p>
+        </p:txBody>
+      </p:sp>
+      <p:sp>
+        <p:nvSpPr>
+          <p:cNvPr id="100" name="Shape 98"/>
+          <p:cNvSpPr/>
+          <p:nvPr/>
+        </p:nvSpPr>
+        <p:spPr>
+          <a:xfrm>
+            <a:off x="5733288" y="5472684"/>
+            <a:ext cx="246888" cy="73152"/>
+          </a:xfrm>
+          <a:prstGeom prst="rect">
+            <a:avLst>
+              <a:gd name="adj" fmla="val 25000"/>
+            </a:avLst>
+          </a:prstGeom>
+          <a:solidFill>
+            <a:srgbClr val="64748B"/>
+          </a:solidFill>
+          <a:ln/>
+        </p:spPr>
+      </p:sp>
+      <p:sp>
+        <p:nvSpPr>
+          <p:cNvPr id="101" name="Text 99"/>
+          <p:cNvSpPr/>
+          <p:nvPr/>
+        </p:nvSpPr>
+        <p:spPr>
+          <a:xfrm>
+            <a:off x="5943600" y="5381244"/>
+            <a:ext cx="219456" cy="256032"/>
+          </a:xfrm>
+          <a:prstGeom prst="rect">
+            <a:avLst/>
+          </a:prstGeom>
+          <a:noFill/>
+          <a:ln/>
+        </p:spPr>
+        <p:txBody>
+          <a:bodyPr wrap="square" rtlCol="0" anchor="ctr"/>
+          <a:lstStyle/>
+          <a:p>
+            <a:pPr algn="ctr" indent="0" marL="0">
+              <a:buNone/>
+            </a:pPr>
+            <a:r>
+              <a:rPr lang="en-US" sz="1400" dirty="0">
+                <a:solidFill>
+                  <a:srgbClr val="64748B"/>
+                </a:solidFill>
+                <a:latin typeface="Arial" pitchFamily="34" charset="0"/>
+                <a:ea typeface="Arial" pitchFamily="34" charset="-122"/>
+                <a:cs typeface="Arial" pitchFamily="34" charset="-120"/>
+              </a:rPr>
+              <a:t>▶</a:t>
+            </a:r>
+            <a:endParaRPr lang="en-US" sz="1400" dirty="0"/>
+          </a:p>
+        </p:txBody>
+      </p:sp>
+      <p:sp>
+        <p:nvSpPr>
+          <p:cNvPr id="102" name="Shape 100"/>
+          <p:cNvSpPr/>
+          <p:nvPr/>
+        </p:nvSpPr>
+        <p:spPr>
+          <a:xfrm>
+            <a:off x="8887968" y="5472684"/>
+            <a:ext cx="246888" cy="73152"/>
+          </a:xfrm>
+          <a:prstGeom prst="rect">
+            <a:avLst>
+              <a:gd name="adj" fmla="val 25000"/>
+            </a:avLst>
+          </a:prstGeom>
+          <a:solidFill>
+            <a:srgbClr val="64748B"/>
+          </a:solidFill>
+          <a:ln/>
+        </p:spPr>
+      </p:sp>
+      <p:sp>
+        <p:nvSpPr>
+          <p:cNvPr id="103" name="Text 101"/>
+          <p:cNvSpPr/>
+          <p:nvPr/>
+        </p:nvSpPr>
+        <p:spPr>
+          <a:xfrm>
+            <a:off x="9098280" y="5381244"/>
+            <a:ext cx="219456" cy="256032"/>
+          </a:xfrm>
+          <a:prstGeom prst="rect">
+            <a:avLst/>
+          </a:prstGeom>
+          <a:noFill/>
+          <a:ln/>
+        </p:spPr>
+        <p:txBody>
+          <a:bodyPr wrap="square" rtlCol="0" anchor="ctr"/>
+          <a:lstStyle/>
+          <a:p>
+            <a:pPr algn="ctr" indent="0" marL="0">
+              <a:buNone/>
+            </a:pPr>
+            <a:r>
+              <a:rPr lang="en-US" sz="1400" dirty="0">
+                <a:solidFill>
+                  <a:srgbClr val="64748B"/>
+                </a:solidFill>
+                <a:latin typeface="Arial" pitchFamily="34" charset="0"/>
+                <a:ea typeface="Arial" pitchFamily="34" charset="-122"/>
+                <a:cs typeface="Arial" pitchFamily="34" charset="-120"/>
+              </a:rPr>
+              <a:t>▶</a:t>
+            </a:r>
+            <a:endParaRPr lang="en-US" sz="1400" dirty="0"/>
+          </a:p>
+        </p:txBody>
+      </p:sp>
+      <p:sp>
+        <p:nvSpPr>
+          <p:cNvPr id="104" name="Shape 102"/>
+          <p:cNvSpPr/>
+          <p:nvPr/>
+        </p:nvSpPr>
+        <p:spPr>
+          <a:xfrm>
+            <a:off x="137160" y="6355080"/>
+            <a:ext cx="11887200" cy="384048"/>
+          </a:xfrm>
+          <a:prstGeom prst="rect">
+            <a:avLst>
+              <a:gd name="adj" fmla="val 19048"/>
+            </a:avLst>
+          </a:prstGeom>
+          <a:solidFill>
             <a:srgbClr val="0F172A"/>
           </a:solidFill>
           <a:ln/>
@@ -6992,14 +7576,14 @@
       </p:sp>
       <p:sp>
         <p:nvSpPr>
-          <p:cNvPr id="88" name="Text 86"/>
-          <p:cNvSpPr/>
-          <p:nvPr/>
-        </p:nvSpPr>
-        <p:spPr>
-          <a:xfrm>
-            <a:off x="274320" y="6126480"/>
-            <a:ext cx="11612880" cy="457200"/>
+          <p:cNvPr id="105" name="Text 103"/>
+          <p:cNvSpPr/>
+          <p:nvPr/>
+        </p:nvSpPr>
+        <p:spPr>
+          <a:xfrm>
+            <a:off x="137160" y="6355080"/>
+            <a:ext cx="11887200" cy="384048"/>
           </a:xfrm>
           <a:prstGeom prst="rect">
             <a:avLst/>
@@ -7015,7 +7599,7 @@
               <a:buNone/>
             </a:pPr>
             <a:r>
-              <a:rPr lang="en-US" sz="1200" b="1" dirty="0">
+              <a:rPr lang="en-US" sz="1100" b="1" dirty="0">
                 <a:solidFill>
                   <a:srgbClr val="FFFFFF"/>
                 </a:solidFill>
@@ -7025,7 +7609,7 @@
               </a:rPr>
               <a:t>USER  →  AI  →  AUTOMATED  →  VALIDATED  →  RESOLVED    |    Total: 45 seconds    |    20 steps, only 3 require human input</a:t>
             </a:r>
-            <a:endParaRPr lang="en-US" sz="1200" dirty="0"/>
+            <a:endParaRPr lang="en-US" sz="1100" dirty="0"/>
           </a:p>
         </p:txBody>
       </p:sp>
@@ -7233,30 +7817,30 @@
         </p:nvSpPr>
         <p:spPr>
           <a:xfrm>
+            <a:off x="3200400" y="1755648"/>
+            <a:ext cx="2286000" cy="347472"/>
+          </a:xfrm>
+          <a:prstGeom prst="rect">
+            <a:avLst>
+              <a:gd name="adj" fmla="val 15789"/>
+            </a:avLst>
+          </a:prstGeom>
+          <a:solidFill>
+            <a:srgbClr val="FECACA"/>
+          </a:solidFill>
+          <a:ln/>
+        </p:spPr>
+      </p:sp>
+      <p:sp>
+        <p:nvSpPr>
+          <p:cNvPr id="8" name="Text 6"/>
+          <p:cNvSpPr/>
+          <p:nvPr/>
+        </p:nvSpPr>
+        <p:spPr>
+          <a:xfrm>
             <a:off x="3200400" y="1737360"/>
-            <a:ext cx="2286000" cy="365760"/>
-          </a:xfrm>
-          <a:prstGeom prst="rect">
-            <a:avLst>
-              <a:gd name="adj" fmla="val 15000"/>
-            </a:avLst>
-          </a:prstGeom>
-          <a:solidFill>
-            <a:srgbClr val="FECACA"/>
-          </a:solidFill>
-          <a:ln/>
-        </p:spPr>
-      </p:sp>
-      <p:sp>
-        <p:nvSpPr>
-          <p:cNvPr id="8" name="Text 6"/>
-          <p:cNvSpPr/>
-          <p:nvPr/>
-        </p:nvSpPr>
-        <p:spPr>
-          <a:xfrm>
-            <a:off x="3200400" y="1737360"/>
-            <a:ext cx="2286000" cy="365760"/>
+            <a:ext cx="2286000" cy="384048"/>
           </a:xfrm>
           <a:prstGeom prst="rect">
             <a:avLst/>
@@ -7333,30 +7917,30 @@
         </p:nvSpPr>
         <p:spPr>
           <a:xfrm>
+            <a:off x="3200400" y="2258568"/>
+            <a:ext cx="2286000" cy="347472"/>
+          </a:xfrm>
+          <a:prstGeom prst="rect">
+            <a:avLst>
+              <a:gd name="adj" fmla="val 15789"/>
+            </a:avLst>
+          </a:prstGeom>
+          <a:solidFill>
+            <a:srgbClr val="FECACA"/>
+          </a:solidFill>
+          <a:ln/>
+        </p:spPr>
+      </p:sp>
+      <p:sp>
+        <p:nvSpPr>
+          <p:cNvPr id="11" name="Text 9"/>
+          <p:cNvSpPr/>
+          <p:nvPr/>
+        </p:nvSpPr>
+        <p:spPr>
+          <a:xfrm>
             <a:off x="3200400" y="2240280"/>
-            <a:ext cx="2286000" cy="365760"/>
-          </a:xfrm>
-          <a:prstGeom prst="rect">
-            <a:avLst>
-              <a:gd name="adj" fmla="val 15000"/>
-            </a:avLst>
-          </a:prstGeom>
-          <a:solidFill>
-            <a:srgbClr val="FECACA"/>
-          </a:solidFill>
-          <a:ln/>
-        </p:spPr>
-      </p:sp>
-      <p:sp>
-        <p:nvSpPr>
-          <p:cNvPr id="11" name="Text 9"/>
-          <p:cNvSpPr/>
-          <p:nvPr/>
-        </p:nvSpPr>
-        <p:spPr>
-          <a:xfrm>
-            <a:off x="3200400" y="2240280"/>
-            <a:ext cx="2286000" cy="365760"/>
+            <a:ext cx="2286000" cy="384048"/>
           </a:xfrm>
           <a:prstGeom prst="rect">
             <a:avLst/>
@@ -7433,30 +8017,30 @@
         </p:nvSpPr>
         <p:spPr>
           <a:xfrm>
+            <a:off x="3200400" y="2761488"/>
+            <a:ext cx="2286000" cy="347472"/>
+          </a:xfrm>
+          <a:prstGeom prst="rect">
+            <a:avLst>
+              <a:gd name="adj" fmla="val 15789"/>
+            </a:avLst>
+          </a:prstGeom>
+          <a:solidFill>
+            <a:srgbClr val="FECACA"/>
+          </a:solidFill>
+          <a:ln/>
+        </p:spPr>
+      </p:sp>
+      <p:sp>
+        <p:nvSpPr>
+          <p:cNvPr id="14" name="Text 12"/>
+          <p:cNvSpPr/>
+          <p:nvPr/>
+        </p:nvSpPr>
+        <p:spPr>
+          <a:xfrm>
             <a:off x="3200400" y="2743200"/>
-            <a:ext cx="2286000" cy="365760"/>
-          </a:xfrm>
-          <a:prstGeom prst="rect">
-            <a:avLst>
-              <a:gd name="adj" fmla="val 15000"/>
-            </a:avLst>
-          </a:prstGeom>
-          <a:solidFill>
-            <a:srgbClr val="FECACA"/>
-          </a:solidFill>
-          <a:ln/>
-        </p:spPr>
-      </p:sp>
-      <p:sp>
-        <p:nvSpPr>
-          <p:cNvPr id="14" name="Text 12"/>
-          <p:cNvSpPr/>
-          <p:nvPr/>
-        </p:nvSpPr>
-        <p:spPr>
-          <a:xfrm>
-            <a:off x="3200400" y="2743200"/>
-            <a:ext cx="2286000" cy="365760"/>
+            <a:ext cx="2286000" cy="384048"/>
           </a:xfrm>
           <a:prstGeom prst="rect">
             <a:avLst/>
@@ -7533,30 +8117,30 @@
         </p:nvSpPr>
         <p:spPr>
           <a:xfrm>
+            <a:off x="3200400" y="3264408"/>
+            <a:ext cx="2286000" cy="347472"/>
+          </a:xfrm>
+          <a:prstGeom prst="rect">
+            <a:avLst>
+              <a:gd name="adj" fmla="val 15789"/>
+            </a:avLst>
+          </a:prstGeom>
+          <a:solidFill>
+            <a:srgbClr val="FECACA"/>
+          </a:solidFill>
+          <a:ln/>
+        </p:spPr>
+      </p:sp>
+      <p:sp>
+        <p:nvSpPr>
+          <p:cNvPr id="17" name="Text 15"/>
+          <p:cNvSpPr/>
+          <p:nvPr/>
+        </p:nvSpPr>
+        <p:spPr>
+          <a:xfrm>
             <a:off x="3200400" y="3246120"/>
-            <a:ext cx="2286000" cy="365760"/>
-          </a:xfrm>
-          <a:prstGeom prst="rect">
-            <a:avLst>
-              <a:gd name="adj" fmla="val 15000"/>
-            </a:avLst>
-          </a:prstGeom>
-          <a:solidFill>
-            <a:srgbClr val="FECACA"/>
-          </a:solidFill>
-          <a:ln/>
-        </p:spPr>
-      </p:sp>
-      <p:sp>
-        <p:nvSpPr>
-          <p:cNvPr id="17" name="Text 15"/>
-          <p:cNvSpPr/>
-          <p:nvPr/>
-        </p:nvSpPr>
-        <p:spPr>
-          <a:xfrm>
-            <a:off x="3200400" y="3246120"/>
-            <a:ext cx="2286000" cy="365760"/>
+            <a:ext cx="2286000" cy="384048"/>
           </a:xfrm>
           <a:prstGeom prst="rect">
             <a:avLst/>
@@ -7633,30 +8217,30 @@
         </p:nvSpPr>
         <p:spPr>
           <a:xfrm>
+            <a:off x="3200400" y="3767328"/>
+            <a:ext cx="2286000" cy="347472"/>
+          </a:xfrm>
+          <a:prstGeom prst="rect">
+            <a:avLst>
+              <a:gd name="adj" fmla="val 15789"/>
+            </a:avLst>
+          </a:prstGeom>
+          <a:solidFill>
+            <a:srgbClr val="FECACA"/>
+          </a:solidFill>
+          <a:ln/>
+        </p:spPr>
+      </p:sp>
+      <p:sp>
+        <p:nvSpPr>
+          <p:cNvPr id="20" name="Text 18"/>
+          <p:cNvSpPr/>
+          <p:nvPr/>
+        </p:nvSpPr>
+        <p:spPr>
+          <a:xfrm>
             <a:off x="3200400" y="3749040"/>
-            <a:ext cx="2286000" cy="365760"/>
-          </a:xfrm>
-          <a:prstGeom prst="rect">
-            <a:avLst>
-              <a:gd name="adj" fmla="val 15000"/>
-            </a:avLst>
-          </a:prstGeom>
-          <a:solidFill>
-            <a:srgbClr val="FECACA"/>
-          </a:solidFill>
-          <a:ln/>
-        </p:spPr>
-      </p:sp>
-      <p:sp>
-        <p:nvSpPr>
-          <p:cNvPr id="20" name="Text 18"/>
-          <p:cNvSpPr/>
-          <p:nvPr/>
-        </p:nvSpPr>
-        <p:spPr>
-          <a:xfrm>
-            <a:off x="3200400" y="3749040"/>
-            <a:ext cx="2286000" cy="365760"/>
+            <a:ext cx="2286000" cy="384048"/>
           </a:xfrm>
           <a:prstGeom prst="rect">
             <a:avLst/>
@@ -7733,30 +8317,30 @@
         </p:nvSpPr>
         <p:spPr>
           <a:xfrm>
+            <a:off x="3200400" y="4270248"/>
+            <a:ext cx="2286000" cy="347472"/>
+          </a:xfrm>
+          <a:prstGeom prst="rect">
+            <a:avLst>
+              <a:gd name="adj" fmla="val 15789"/>
+            </a:avLst>
+          </a:prstGeom>
+          <a:solidFill>
+            <a:srgbClr val="FECACA"/>
+          </a:solidFill>
+          <a:ln/>
+        </p:spPr>
+      </p:sp>
+      <p:sp>
+        <p:nvSpPr>
+          <p:cNvPr id="23" name="Text 21"/>
+          <p:cNvSpPr/>
+          <p:nvPr/>
+        </p:nvSpPr>
+        <p:spPr>
+          <a:xfrm>
             <a:off x="3200400" y="4251960"/>
-            <a:ext cx="2286000" cy="365760"/>
-          </a:xfrm>
-          <a:prstGeom prst="rect">
-            <a:avLst>
-              <a:gd name="adj" fmla="val 15000"/>
-            </a:avLst>
-          </a:prstGeom>
-          <a:solidFill>
-            <a:srgbClr val="FECACA"/>
-          </a:solidFill>
-          <a:ln/>
-        </p:spPr>
-      </p:sp>
-      <p:sp>
-        <p:nvSpPr>
-          <p:cNvPr id="23" name="Text 21"/>
-          <p:cNvSpPr/>
-          <p:nvPr/>
-        </p:nvSpPr>
-        <p:spPr>
-          <a:xfrm>
-            <a:off x="3200400" y="4251960"/>
-            <a:ext cx="2286000" cy="365760"/>
+            <a:ext cx="2286000" cy="384048"/>
           </a:xfrm>
           <a:prstGeom prst="rect">
             <a:avLst/>
@@ -7833,30 +8417,30 @@
         </p:nvSpPr>
         <p:spPr>
           <a:xfrm>
+            <a:off x="3200400" y="4773168"/>
+            <a:ext cx="2286000" cy="347472"/>
+          </a:xfrm>
+          <a:prstGeom prst="rect">
+            <a:avLst>
+              <a:gd name="adj" fmla="val 15789"/>
+            </a:avLst>
+          </a:prstGeom>
+          <a:solidFill>
+            <a:srgbClr val="FECACA"/>
+          </a:solidFill>
+          <a:ln/>
+        </p:spPr>
+      </p:sp>
+      <p:sp>
+        <p:nvSpPr>
+          <p:cNvPr id="26" name="Text 24"/>
+          <p:cNvSpPr/>
+          <p:nvPr/>
+        </p:nvSpPr>
+        <p:spPr>
+          <a:xfrm>
             <a:off x="3200400" y="4754880"/>
-            <a:ext cx="2286000" cy="365760"/>
-          </a:xfrm>
-          <a:prstGeom prst="rect">
-            <a:avLst>
-              <a:gd name="adj" fmla="val 15000"/>
-            </a:avLst>
-          </a:prstGeom>
-          <a:solidFill>
-            <a:srgbClr val="FECACA"/>
-          </a:solidFill>
-          <a:ln/>
-        </p:spPr>
-      </p:sp>
-      <p:sp>
-        <p:nvSpPr>
-          <p:cNvPr id="26" name="Text 24"/>
-          <p:cNvSpPr/>
-          <p:nvPr/>
-        </p:nvSpPr>
-        <p:spPr>
-          <a:xfrm>
-            <a:off x="3200400" y="4754880"/>
-            <a:ext cx="2286000" cy="365760"/>
+            <a:ext cx="2286000" cy="384048"/>
           </a:xfrm>
           <a:prstGeom prst="rect">
             <a:avLst/>
@@ -7933,30 +8517,30 @@
         </p:nvSpPr>
         <p:spPr>
           <a:xfrm>
+            <a:off x="3200400" y="5276088"/>
+            <a:ext cx="2286000" cy="347472"/>
+          </a:xfrm>
+          <a:prstGeom prst="rect">
+            <a:avLst>
+              <a:gd name="adj" fmla="val 15789"/>
+            </a:avLst>
+          </a:prstGeom>
+          <a:solidFill>
+            <a:srgbClr val="FECACA"/>
+          </a:solidFill>
+          <a:ln/>
+        </p:spPr>
+      </p:sp>
+      <p:sp>
+        <p:nvSpPr>
+          <p:cNvPr id="29" name="Text 27"/>
+          <p:cNvSpPr/>
+          <p:nvPr/>
+        </p:nvSpPr>
+        <p:spPr>
+          <a:xfrm>
             <a:off x="3200400" y="5257800"/>
-            <a:ext cx="2286000" cy="365760"/>
-          </a:xfrm>
-          <a:prstGeom prst="rect">
-            <a:avLst>
-              <a:gd name="adj" fmla="val 15000"/>
-            </a:avLst>
-          </a:prstGeom>
-          <a:solidFill>
-            <a:srgbClr val="FECACA"/>
-          </a:solidFill>
-          <a:ln/>
-        </p:spPr>
-      </p:sp>
-      <p:sp>
-        <p:nvSpPr>
-          <p:cNvPr id="29" name="Text 27"/>
-          <p:cNvSpPr/>
-          <p:nvPr/>
-        </p:nvSpPr>
-        <p:spPr>
-          <a:xfrm>
-            <a:off x="3200400" y="5257800"/>
-            <a:ext cx="2286000" cy="365760"/>
+            <a:ext cx="2286000" cy="384048"/>
           </a:xfrm>
           <a:prstGeom prst="rect">
             <a:avLst/>
@@ -7988,7 +8572,46 @@
       </p:sp>
       <p:sp>
         <p:nvSpPr>
-          <p:cNvPr id="30" name="Shape 28"/>
+          <p:cNvPr id="30" name="Text 28"/>
+          <p:cNvSpPr/>
+          <p:nvPr/>
+        </p:nvSpPr>
+        <p:spPr>
+          <a:xfrm>
+            <a:off x="5303520" y="3200400"/>
+            <a:ext cx="1554480" cy="731520"/>
+          </a:xfrm>
+          <a:prstGeom prst="rect">
+            <a:avLst/>
+          </a:prstGeom>
+          <a:noFill/>
+          <a:ln/>
+        </p:spPr>
+        <p:txBody>
+          <a:bodyPr wrap="square" rtlCol="0" anchor="ctr"/>
+          <a:lstStyle/>
+          <a:p>
+            <a:pPr algn="ctr" indent="0" marL="0">
+              <a:buNone/>
+            </a:pPr>
+            <a:r>
+              <a:rPr lang="en-US" sz="4800" dirty="0">
+                <a:solidFill>
+                  <a:srgbClr val="2563EB"/>
+                </a:solidFill>
+                <a:latin typeface="Arial" pitchFamily="34" charset="0"/>
+                <a:ea typeface="Arial" pitchFamily="34" charset="-122"/>
+                <a:cs typeface="Arial" pitchFamily="34" charset="-120"/>
+              </a:rPr>
+              <a:t>➡</a:t>
+            </a:r>
+            <a:endParaRPr lang="en-US" sz="4800" dirty="0"/>
+          </a:p>
+        </p:txBody>
+      </p:sp>
+      <p:sp>
+        <p:nvSpPr>
+          <p:cNvPr id="31" name="Shape 29"/>
           <p:cNvSpPr/>
           <p:nvPr/>
         </p:nvSpPr>
@@ -8015,7 +8638,7 @@
       </p:sp>
       <p:sp>
         <p:nvSpPr>
-          <p:cNvPr id="31" name="Text 29"/>
+          <p:cNvPr id="32" name="Text 30"/>
           <p:cNvSpPr/>
           <p:nvPr/>
         </p:nvSpPr>
@@ -8054,7 +8677,7 @@
       </p:sp>
       <p:sp>
         <p:nvSpPr>
-          <p:cNvPr id="32" name="Text 30"/>
+          <p:cNvPr id="33" name="Text 31"/>
           <p:cNvSpPr/>
           <p:nvPr/>
         </p:nvSpPr>
@@ -8093,36 +8716,36 @@
       </p:sp>
       <p:sp>
         <p:nvSpPr>
-          <p:cNvPr id="33" name="Shape 31"/>
+          <p:cNvPr id="34" name="Shape 32"/>
+          <p:cNvSpPr/>
+          <p:nvPr/>
+        </p:nvSpPr>
+        <p:spPr>
+          <a:xfrm>
+            <a:off x="9144000" y="1755648"/>
+            <a:ext cx="2286000" cy="347472"/>
+          </a:xfrm>
+          <a:prstGeom prst="rect">
+            <a:avLst>
+              <a:gd name="adj" fmla="val 15789"/>
+            </a:avLst>
+          </a:prstGeom>
+          <a:solidFill>
+            <a:srgbClr val="BBF7D0"/>
+          </a:solidFill>
+          <a:ln/>
+        </p:spPr>
+      </p:sp>
+      <p:sp>
+        <p:nvSpPr>
+          <p:cNvPr id="35" name="Text 33"/>
           <p:cNvSpPr/>
           <p:nvPr/>
         </p:nvSpPr>
         <p:spPr>
           <a:xfrm>
             <a:off x="9144000" y="1737360"/>
-            <a:ext cx="2286000" cy="365760"/>
-          </a:xfrm>
-          <a:prstGeom prst="rect">
-            <a:avLst>
-              <a:gd name="adj" fmla="val 15000"/>
-            </a:avLst>
-          </a:prstGeom>
-          <a:solidFill>
-            <a:srgbClr val="BBF7D0"/>
-          </a:solidFill>
-          <a:ln/>
-        </p:spPr>
-      </p:sp>
-      <p:sp>
-        <p:nvSpPr>
-          <p:cNvPr id="34" name="Text 32"/>
-          <p:cNvSpPr/>
-          <p:nvPr/>
-        </p:nvSpPr>
-        <p:spPr>
-          <a:xfrm>
-            <a:off x="9144000" y="1737360"/>
-            <a:ext cx="2286000" cy="365760"/>
+            <a:ext cx="2286000" cy="384048"/>
           </a:xfrm>
           <a:prstGeom prst="rect">
             <a:avLst/>
@@ -8154,7 +8777,7 @@
       </p:sp>
       <p:sp>
         <p:nvSpPr>
-          <p:cNvPr id="35" name="Text 33"/>
+          <p:cNvPr id="36" name="Text 34"/>
           <p:cNvSpPr/>
           <p:nvPr/>
         </p:nvSpPr>
@@ -8193,36 +8816,36 @@
       </p:sp>
       <p:sp>
         <p:nvSpPr>
-          <p:cNvPr id="36" name="Shape 34"/>
+          <p:cNvPr id="37" name="Shape 35"/>
+          <p:cNvSpPr/>
+          <p:nvPr/>
+        </p:nvSpPr>
+        <p:spPr>
+          <a:xfrm>
+            <a:off x="9144000" y="2258568"/>
+            <a:ext cx="2286000" cy="347472"/>
+          </a:xfrm>
+          <a:prstGeom prst="rect">
+            <a:avLst>
+              <a:gd name="adj" fmla="val 15789"/>
+            </a:avLst>
+          </a:prstGeom>
+          <a:solidFill>
+            <a:srgbClr val="BBF7D0"/>
+          </a:solidFill>
+          <a:ln/>
+        </p:spPr>
+      </p:sp>
+      <p:sp>
+        <p:nvSpPr>
+          <p:cNvPr id="38" name="Text 36"/>
           <p:cNvSpPr/>
           <p:nvPr/>
         </p:nvSpPr>
         <p:spPr>
           <a:xfrm>
             <a:off x="9144000" y="2240280"/>
-            <a:ext cx="2286000" cy="365760"/>
-          </a:xfrm>
-          <a:prstGeom prst="rect">
-            <a:avLst>
-              <a:gd name="adj" fmla="val 15000"/>
-            </a:avLst>
-          </a:prstGeom>
-          <a:solidFill>
-            <a:srgbClr val="BBF7D0"/>
-          </a:solidFill>
-          <a:ln/>
-        </p:spPr>
-      </p:sp>
-      <p:sp>
-        <p:nvSpPr>
-          <p:cNvPr id="37" name="Text 35"/>
-          <p:cNvSpPr/>
-          <p:nvPr/>
-        </p:nvSpPr>
-        <p:spPr>
-          <a:xfrm>
-            <a:off x="9144000" y="2240280"/>
-            <a:ext cx="2286000" cy="365760"/>
+            <a:ext cx="2286000" cy="384048"/>
           </a:xfrm>
           <a:prstGeom prst="rect">
             <a:avLst/>
@@ -8254,7 +8877,7 @@
       </p:sp>
       <p:sp>
         <p:nvSpPr>
-          <p:cNvPr id="38" name="Text 36"/>
+          <p:cNvPr id="39" name="Text 37"/>
           <p:cNvSpPr/>
           <p:nvPr/>
         </p:nvSpPr>
@@ -8293,36 +8916,36 @@
       </p:sp>
       <p:sp>
         <p:nvSpPr>
-          <p:cNvPr id="39" name="Shape 37"/>
+          <p:cNvPr id="40" name="Shape 38"/>
+          <p:cNvSpPr/>
+          <p:nvPr/>
+        </p:nvSpPr>
+        <p:spPr>
+          <a:xfrm>
+            <a:off x="9144000" y="2761488"/>
+            <a:ext cx="2286000" cy="347472"/>
+          </a:xfrm>
+          <a:prstGeom prst="rect">
+            <a:avLst>
+              <a:gd name="adj" fmla="val 15789"/>
+            </a:avLst>
+          </a:prstGeom>
+          <a:solidFill>
+            <a:srgbClr val="BBF7D0"/>
+          </a:solidFill>
+          <a:ln/>
+        </p:spPr>
+      </p:sp>
+      <p:sp>
+        <p:nvSpPr>
+          <p:cNvPr id="41" name="Text 39"/>
           <p:cNvSpPr/>
           <p:nvPr/>
         </p:nvSpPr>
         <p:spPr>
           <a:xfrm>
             <a:off x="9144000" y="2743200"/>
-            <a:ext cx="2286000" cy="365760"/>
-          </a:xfrm>
-          <a:prstGeom prst="rect">
-            <a:avLst>
-              <a:gd name="adj" fmla="val 15000"/>
-            </a:avLst>
-          </a:prstGeom>
-          <a:solidFill>
-            <a:srgbClr val="BBF7D0"/>
-          </a:solidFill>
-          <a:ln/>
-        </p:spPr>
-      </p:sp>
-      <p:sp>
-        <p:nvSpPr>
-          <p:cNvPr id="40" name="Text 38"/>
-          <p:cNvSpPr/>
-          <p:nvPr/>
-        </p:nvSpPr>
-        <p:spPr>
-          <a:xfrm>
-            <a:off x="9144000" y="2743200"/>
-            <a:ext cx="2286000" cy="365760"/>
+            <a:ext cx="2286000" cy="384048"/>
           </a:xfrm>
           <a:prstGeom prst="rect">
             <a:avLst/>
@@ -8354,7 +8977,7 @@
       </p:sp>
       <p:sp>
         <p:nvSpPr>
-          <p:cNvPr id="41" name="Text 39"/>
+          <p:cNvPr id="42" name="Text 40"/>
           <p:cNvSpPr/>
           <p:nvPr/>
         </p:nvSpPr>
@@ -8393,36 +9016,36 @@
       </p:sp>
       <p:sp>
         <p:nvSpPr>
-          <p:cNvPr id="42" name="Shape 40"/>
+          <p:cNvPr id="43" name="Shape 41"/>
+          <p:cNvSpPr/>
+          <p:nvPr/>
+        </p:nvSpPr>
+        <p:spPr>
+          <a:xfrm>
+            <a:off x="9144000" y="3264408"/>
+            <a:ext cx="2286000" cy="347472"/>
+          </a:xfrm>
+          <a:prstGeom prst="rect">
+            <a:avLst>
+              <a:gd name="adj" fmla="val 15789"/>
+            </a:avLst>
+          </a:prstGeom>
+          <a:solidFill>
+            <a:srgbClr val="BBF7D0"/>
+          </a:solidFill>
+          <a:ln/>
+        </p:spPr>
+      </p:sp>
+      <p:sp>
+        <p:nvSpPr>
+          <p:cNvPr id="44" name="Text 42"/>
           <p:cNvSpPr/>
           <p:nvPr/>
         </p:nvSpPr>
         <p:spPr>
           <a:xfrm>
             <a:off x="9144000" y="3246120"/>
-            <a:ext cx="2286000" cy="365760"/>
-          </a:xfrm>
-          <a:prstGeom prst="rect">
-            <a:avLst>
-              <a:gd name="adj" fmla="val 15000"/>
-            </a:avLst>
-          </a:prstGeom>
-          <a:solidFill>
-            <a:srgbClr val="BBF7D0"/>
-          </a:solidFill>
-          <a:ln/>
-        </p:spPr>
-      </p:sp>
-      <p:sp>
-        <p:nvSpPr>
-          <p:cNvPr id="43" name="Text 41"/>
-          <p:cNvSpPr/>
-          <p:nvPr/>
-        </p:nvSpPr>
-        <p:spPr>
-          <a:xfrm>
-            <a:off x="9144000" y="3246120"/>
-            <a:ext cx="2286000" cy="365760"/>
+            <a:ext cx="2286000" cy="384048"/>
           </a:xfrm>
           <a:prstGeom prst="rect">
             <a:avLst/>
@@ -8454,7 +9077,7 @@
       </p:sp>
       <p:sp>
         <p:nvSpPr>
-          <p:cNvPr id="44" name="Text 42"/>
+          <p:cNvPr id="45" name="Text 43"/>
           <p:cNvSpPr/>
           <p:nvPr/>
         </p:nvSpPr>
@@ -8493,36 +9116,36 @@
       </p:sp>
       <p:sp>
         <p:nvSpPr>
-          <p:cNvPr id="45" name="Shape 43"/>
+          <p:cNvPr id="46" name="Shape 44"/>
+          <p:cNvSpPr/>
+          <p:nvPr/>
+        </p:nvSpPr>
+        <p:spPr>
+          <a:xfrm>
+            <a:off x="9144000" y="3767328"/>
+            <a:ext cx="2286000" cy="347472"/>
+          </a:xfrm>
+          <a:prstGeom prst="rect">
+            <a:avLst>
+              <a:gd name="adj" fmla="val 15789"/>
+            </a:avLst>
+          </a:prstGeom>
+          <a:solidFill>
+            <a:srgbClr val="BBF7D0"/>
+          </a:solidFill>
+          <a:ln/>
+        </p:spPr>
+      </p:sp>
+      <p:sp>
+        <p:nvSpPr>
+          <p:cNvPr id="47" name="Text 45"/>
           <p:cNvSpPr/>
           <p:nvPr/>
         </p:nvSpPr>
         <p:spPr>
           <a:xfrm>
             <a:off x="9144000" y="3749040"/>
-            <a:ext cx="2286000" cy="365760"/>
-          </a:xfrm>
-          <a:prstGeom prst="rect">
-            <a:avLst>
-              <a:gd name="adj" fmla="val 15000"/>
-            </a:avLst>
-          </a:prstGeom>
-          <a:solidFill>
-            <a:srgbClr val="BBF7D0"/>
-          </a:solidFill>
-          <a:ln/>
-        </p:spPr>
-      </p:sp>
-      <p:sp>
-        <p:nvSpPr>
-          <p:cNvPr id="46" name="Text 44"/>
-          <p:cNvSpPr/>
-          <p:nvPr/>
-        </p:nvSpPr>
-        <p:spPr>
-          <a:xfrm>
-            <a:off x="9144000" y="3749040"/>
-            <a:ext cx="2286000" cy="365760"/>
+            <a:ext cx="2286000" cy="384048"/>
           </a:xfrm>
           <a:prstGeom prst="rect">
             <a:avLst/>
@@ -8554,7 +9177,7 @@
       </p:sp>
       <p:sp>
         <p:nvSpPr>
-          <p:cNvPr id="47" name="Text 45"/>
+          <p:cNvPr id="48" name="Text 46"/>
           <p:cNvSpPr/>
           <p:nvPr/>
         </p:nvSpPr>
@@ -8593,36 +9216,36 @@
       </p:sp>
       <p:sp>
         <p:nvSpPr>
-          <p:cNvPr id="48" name="Shape 46"/>
+          <p:cNvPr id="49" name="Shape 47"/>
+          <p:cNvSpPr/>
+          <p:nvPr/>
+        </p:nvSpPr>
+        <p:spPr>
+          <a:xfrm>
+            <a:off x="9144000" y="4270248"/>
+            <a:ext cx="2286000" cy="347472"/>
+          </a:xfrm>
+          <a:prstGeom prst="rect">
+            <a:avLst>
+              <a:gd name="adj" fmla="val 15789"/>
+            </a:avLst>
+          </a:prstGeom>
+          <a:solidFill>
+            <a:srgbClr val="BBF7D0"/>
+          </a:solidFill>
+          <a:ln/>
+        </p:spPr>
+      </p:sp>
+      <p:sp>
+        <p:nvSpPr>
+          <p:cNvPr id="50" name="Text 48"/>
           <p:cNvSpPr/>
           <p:nvPr/>
         </p:nvSpPr>
         <p:spPr>
           <a:xfrm>
             <a:off x="9144000" y="4251960"/>
-            <a:ext cx="2286000" cy="365760"/>
-          </a:xfrm>
-          <a:prstGeom prst="rect">
-            <a:avLst>
-              <a:gd name="adj" fmla="val 15000"/>
-            </a:avLst>
-          </a:prstGeom>
-          <a:solidFill>
-            <a:srgbClr val="BBF7D0"/>
-          </a:solidFill>
-          <a:ln/>
-        </p:spPr>
-      </p:sp>
-      <p:sp>
-        <p:nvSpPr>
-          <p:cNvPr id="49" name="Text 47"/>
-          <p:cNvSpPr/>
-          <p:nvPr/>
-        </p:nvSpPr>
-        <p:spPr>
-          <a:xfrm>
-            <a:off x="9144000" y="4251960"/>
-            <a:ext cx="2286000" cy="365760"/>
+            <a:ext cx="2286000" cy="384048"/>
           </a:xfrm>
           <a:prstGeom prst="rect">
             <a:avLst/>
@@ -8654,7 +9277,7 @@
       </p:sp>
       <p:sp>
         <p:nvSpPr>
-          <p:cNvPr id="50" name="Text 48"/>
+          <p:cNvPr id="51" name="Text 49"/>
           <p:cNvSpPr/>
           <p:nvPr/>
         </p:nvSpPr>
@@ -8693,36 +9316,36 @@
       </p:sp>
       <p:sp>
         <p:nvSpPr>
-          <p:cNvPr id="51" name="Shape 49"/>
+          <p:cNvPr id="52" name="Shape 50"/>
+          <p:cNvSpPr/>
+          <p:nvPr/>
+        </p:nvSpPr>
+        <p:spPr>
+          <a:xfrm>
+            <a:off x="9144000" y="4773168"/>
+            <a:ext cx="2286000" cy="347472"/>
+          </a:xfrm>
+          <a:prstGeom prst="rect">
+            <a:avLst>
+              <a:gd name="adj" fmla="val 15789"/>
+            </a:avLst>
+          </a:prstGeom>
+          <a:solidFill>
+            <a:srgbClr val="BBF7D0"/>
+          </a:solidFill>
+          <a:ln/>
+        </p:spPr>
+      </p:sp>
+      <p:sp>
+        <p:nvSpPr>
+          <p:cNvPr id="53" name="Text 51"/>
           <p:cNvSpPr/>
           <p:nvPr/>
         </p:nvSpPr>
         <p:spPr>
           <a:xfrm>
             <a:off x="9144000" y="4754880"/>
-            <a:ext cx="2286000" cy="365760"/>
-          </a:xfrm>
-          <a:prstGeom prst="rect">
-            <a:avLst>
-              <a:gd name="adj" fmla="val 15000"/>
-            </a:avLst>
-          </a:prstGeom>
-          <a:solidFill>
-            <a:srgbClr val="BBF7D0"/>
-          </a:solidFill>
-          <a:ln/>
-        </p:spPr>
-      </p:sp>
-      <p:sp>
-        <p:nvSpPr>
-          <p:cNvPr id="52" name="Text 50"/>
-          <p:cNvSpPr/>
-          <p:nvPr/>
-        </p:nvSpPr>
-        <p:spPr>
-          <a:xfrm>
-            <a:off x="9144000" y="4754880"/>
-            <a:ext cx="2286000" cy="365760"/>
+            <a:ext cx="2286000" cy="384048"/>
           </a:xfrm>
           <a:prstGeom prst="rect">
             <a:avLst/>
@@ -8754,7 +9377,7 @@
       </p:sp>
       <p:sp>
         <p:nvSpPr>
-          <p:cNvPr id="53" name="Text 51"/>
+          <p:cNvPr id="54" name="Text 52"/>
           <p:cNvSpPr/>
           <p:nvPr/>
         </p:nvSpPr>
@@ -8793,36 +9416,36 @@
       </p:sp>
       <p:sp>
         <p:nvSpPr>
-          <p:cNvPr id="54" name="Shape 52"/>
+          <p:cNvPr id="55" name="Shape 53"/>
+          <p:cNvSpPr/>
+          <p:nvPr/>
+        </p:nvSpPr>
+        <p:spPr>
+          <a:xfrm>
+            <a:off x="9144000" y="5276088"/>
+            <a:ext cx="2286000" cy="347472"/>
+          </a:xfrm>
+          <a:prstGeom prst="rect">
+            <a:avLst>
+              <a:gd name="adj" fmla="val 15789"/>
+            </a:avLst>
+          </a:prstGeom>
+          <a:solidFill>
+            <a:srgbClr val="BBF7D0"/>
+          </a:solidFill>
+          <a:ln/>
+        </p:spPr>
+      </p:sp>
+      <p:sp>
+        <p:nvSpPr>
+          <p:cNvPr id="56" name="Text 54"/>
           <p:cNvSpPr/>
           <p:nvPr/>
         </p:nvSpPr>
         <p:spPr>
           <a:xfrm>
             <a:off x="9144000" y="5257800"/>
-            <a:ext cx="2286000" cy="365760"/>
-          </a:xfrm>
-          <a:prstGeom prst="rect">
-            <a:avLst>
-              <a:gd name="adj" fmla="val 15000"/>
-            </a:avLst>
-          </a:prstGeom>
-          <a:solidFill>
-            <a:srgbClr val="BBF7D0"/>
-          </a:solidFill>
-          <a:ln/>
-        </p:spPr>
-      </p:sp>
-      <p:sp>
-        <p:nvSpPr>
-          <p:cNvPr id="55" name="Text 53"/>
-          <p:cNvSpPr/>
-          <p:nvPr/>
-        </p:nvSpPr>
-        <p:spPr>
-          <a:xfrm>
-            <a:off x="9144000" y="5257800"/>
-            <a:ext cx="2286000" cy="365760"/>
+            <a:ext cx="2286000" cy="384048"/>
           </a:xfrm>
           <a:prstGeom prst="rect">
             <a:avLst/>
@@ -8849,45 +9472,6 @@
               <a:t>1/1 ✓</a:t>
             </a:r>
             <a:endParaRPr lang="en-US" sz="1200" dirty="0"/>
-          </a:p>
-        </p:txBody>
-      </p:sp>
-      <p:sp>
-        <p:nvSpPr>
-          <p:cNvPr id="56" name="Text 54"/>
-          <p:cNvSpPr/>
-          <p:nvPr/>
-        </p:nvSpPr>
-        <p:spPr>
-          <a:xfrm>
-            <a:off x="5303520" y="3200400"/>
-            <a:ext cx="1554480" cy="731520"/>
-          </a:xfrm>
-          <a:prstGeom prst="rect">
-            <a:avLst/>
-          </a:prstGeom>
-          <a:noFill/>
-          <a:ln/>
-        </p:spPr>
-        <p:txBody>
-          <a:bodyPr wrap="square" rtlCol="0" anchor="ctr"/>
-          <a:lstStyle/>
-          <a:p>
-            <a:pPr algn="ctr" indent="0" marL="0">
-              <a:buNone/>
-            </a:pPr>
-            <a:r>
-              <a:rPr lang="en-US" sz="4800" dirty="0">
-                <a:solidFill>
-                  <a:srgbClr val="2563EB"/>
-                </a:solidFill>
-                <a:latin typeface="Calibri" pitchFamily="34" charset="0"/>
-                <a:ea typeface="Calibri" pitchFamily="34" charset="-122"/>
-                <a:cs typeface="Calibri" pitchFamily="34" charset="-120"/>
-              </a:rPr>
-              <a:t>→</a:t>
-            </a:r>
-            <a:endParaRPr lang="en-US" sz="4800" dirty="0"/>
           </a:p>
         </p:txBody>
       </p:sp>
@@ -9013,7 +9597,7 @@
         <p:spPr>
           <a:xfrm>
             <a:off x="365760" y="868680"/>
-            <a:ext cx="1188720" cy="320040"/>
+            <a:ext cx="1188720" cy="347472"/>
           </a:xfrm>
           <a:prstGeom prst="rect">
             <a:avLst/>
@@ -9051,8 +9635,8 @@
         </p:nvSpPr>
         <p:spPr>
           <a:xfrm>
-            <a:off x="365760" y="1188720"/>
-            <a:ext cx="1188720" cy="274320"/>
+            <a:off x="365760" y="1197864"/>
+            <a:ext cx="1188720" cy="256032"/>
           </a:xfrm>
           <a:prstGeom prst="rect">
             <a:avLst/>
@@ -9154,7 +9738,7 @@
                 <a:ea typeface="Calibri" pitchFamily="34" charset="-122"/>
                 <a:cs typeface="Calibri" pitchFamily="34" charset="-120"/>
               </a:rPr>
-              <a:t>"A pod is crashing in production. Normally takes an SRE 2-4 hours to diagnose and fix. Watch what our AI does."</a:t>
+              <a:t>"A pod is crashing in production. Normally takes 2-4 hours. Watch what our AI does."</a:t>
             </a:r>
             <a:endParaRPr lang="en-US" sz="950" dirty="0"/>
           </a:p>
@@ -9191,7 +9775,7 @@
         <p:spPr>
           <a:xfrm>
             <a:off x="365760" y="1581912"/>
-            <a:ext cx="1188720" cy="320040"/>
+            <a:ext cx="1188720" cy="347472"/>
           </a:xfrm>
           <a:prstGeom prst="rect">
             <a:avLst/>
@@ -9229,8 +9813,8 @@
         </p:nvSpPr>
         <p:spPr>
           <a:xfrm>
-            <a:off x="365760" y="1901952"/>
-            <a:ext cx="1188720" cy="274320"/>
+            <a:off x="365760" y="1911096"/>
+            <a:ext cx="1188720" cy="256032"/>
           </a:xfrm>
           <a:prstGeom prst="rect">
             <a:avLst/>
@@ -9332,24 +9916,7 @@
                 <a:ea typeface="Calibri" pitchFamily="34" charset="-122"/>
                 <a:cs typeface="Calibri" pitchFamily="34" charset="-120"/>
               </a:rPr>
-              <a:t>Type in AI Chat: "Why is my pod mlflow-server crashing?"</a:t>
-            </a:r>
-            <a:endParaRPr lang="en-US" sz="950" dirty="0"/>
-          </a:p>
-          <a:p>
-            <a:pPr indent="0" marL="0">
-              <a:buNone/>
-            </a:pPr>
-            <a:r>
-              <a:rPr lang="en-US" sz="950" dirty="0">
-                <a:solidFill>
-                  <a:srgbClr val="475569"/>
-                </a:solidFill>
-                <a:latin typeface="Calibri" pitchFamily="34" charset="0"/>
-                <a:ea typeface="Calibri" pitchFamily="34" charset="-122"/>
-                <a:cs typeface="Calibri" pitchFamily="34" charset="-120"/>
-              </a:rPr>
-              <a:t>Point out: plain English, no kubectl commands needed.</a:t>
+              <a:t>Type: "Why is my pod mlflow-server crashing?"  Point out: plain English, no kubectl.</a:t>
             </a:r>
             <a:endParaRPr lang="en-US" sz="950" dirty="0"/>
           </a:p>
@@ -9386,7 +9953,7 @@
         <p:spPr>
           <a:xfrm>
             <a:off x="365760" y="2295144"/>
-            <a:ext cx="1188720" cy="320040"/>
+            <a:ext cx="1188720" cy="347472"/>
           </a:xfrm>
           <a:prstGeom prst="rect">
             <a:avLst/>
@@ -9424,8 +9991,8 @@
         </p:nvSpPr>
         <p:spPr>
           <a:xfrm>
-            <a:off x="365760" y="2615184"/>
-            <a:ext cx="1188720" cy="274320"/>
+            <a:off x="365760" y="2624328"/>
+            <a:ext cx="1188720" cy="256032"/>
           </a:xfrm>
           <a:prstGeom prst="rect">
             <a:avLst/>
@@ -9527,7 +10094,7 @@
                 <a:ea typeface="Calibri" pitchFamily="34" charset="-122"/>
                 <a:cs typeface="Calibri" pitchFamily="34" charset="-120"/>
               </a:rPr>
-              <a:t>AI returns: root cause (OOMKilled), evidence (logs + events + metrics), severity classification.</a:t>
+              <a:t>AI returns root cause (OOMKilled), evidence (logs + events + metrics), severity.</a:t>
             </a:r>
             <a:endParaRPr lang="en-US" sz="950" dirty="0"/>
           </a:p>
@@ -9544,7 +10111,7 @@
                 <a:ea typeface="Calibri" pitchFamily="34" charset="-122"/>
                 <a:cs typeface="Calibri" pitchFamily="34" charset="-120"/>
               </a:rPr>
-              <a:t>"The AI collected data from 3 sources, ran hybrid analysis in 10 seconds."</a:t>
+              <a:t>"The AI collected 3 sources, ran hybrid analysis in 10 seconds."</a:t>
             </a:r>
             <a:endParaRPr lang="en-US" sz="950" dirty="0"/>
           </a:p>
@@ -9581,7 +10148,7 @@
         <p:spPr>
           <a:xfrm>
             <a:off x="365760" y="3008376"/>
-            <a:ext cx="1188720" cy="320040"/>
+            <a:ext cx="1188720" cy="347472"/>
           </a:xfrm>
           <a:prstGeom prst="rect">
             <a:avLst/>
@@ -9619,8 +10186,8 @@
         </p:nvSpPr>
         <p:spPr>
           <a:xfrm>
-            <a:off x="365760" y="3328416"/>
-            <a:ext cx="1188720" cy="274320"/>
+            <a:off x="365760" y="3337560"/>
+            <a:ext cx="1188720" cy="256032"/>
           </a:xfrm>
           <a:prstGeom prst="rect">
             <a:avLst/>
@@ -9722,7 +10289,7 @@
                 <a:ea typeface="Calibri" pitchFamily="34" charset="-122"/>
                 <a:cs typeface="Calibri" pitchFamily="34" charset="-120"/>
               </a:rPr>
-              <a:t>Point to fix card: calculated 2Gi memory limit (was 512Mi), data-driven using restart count.</a:t>
+              <a:t>Point to fix card: 2Gi memory (was 512Mi), data-driven using restart count.</a:t>
             </a:r>
             <a:endParaRPr lang="en-US" sz="950" dirty="0"/>
           </a:p>
@@ -9739,7 +10306,7 @@
                 <a:ea typeface="Calibri" pitchFamily="34" charset="-122"/>
                 <a:cs typeface="Calibri" pitchFamily="34" charset="-120"/>
               </a:rPr>
-              <a:t>"Not a guess — the AI used the restart pattern and actual usage to calculate this."</a:t>
+              <a:t>"Not a guess — AI used restart pattern + actual usage to calculate this."</a:t>
             </a:r>
             <a:endParaRPr lang="en-US" sz="950" dirty="0"/>
           </a:p>
@@ -9776,7 +10343,7 @@
         <p:spPr>
           <a:xfrm>
             <a:off x="365760" y="3721608"/>
-            <a:ext cx="1188720" cy="320040"/>
+            <a:ext cx="1188720" cy="347472"/>
           </a:xfrm>
           <a:prstGeom prst="rect">
             <a:avLst/>
@@ -9814,8 +10381,8 @@
         </p:nvSpPr>
         <p:spPr>
           <a:xfrm>
-            <a:off x="365760" y="4041648"/>
-            <a:ext cx="1188720" cy="274320"/>
+            <a:off x="365760" y="4050792"/>
+            <a:ext cx="1188720" cy="256032"/>
           </a:xfrm>
           <a:prstGeom prst="rect">
             <a:avLst/>
@@ -9917,24 +10484,7 @@
                 <a:ea typeface="Calibri" pitchFamily="34" charset="-122"/>
                 <a:cs typeface="Calibri" pitchFamily="34" charset="-120"/>
               </a:rPr>
-              <a:t>"Incident INC already created automatically — severity, description, AI diagnosis all populated.</a:t>
-            </a:r>
-            <a:endParaRPr lang="en-US" sz="950" dirty="0"/>
-          </a:p>
-          <a:p>
-            <a:pPr indent="0" marL="0">
-              <a:buNone/>
-            </a:pPr>
-            <a:r>
-              <a:rPr lang="en-US" sz="950" dirty="0">
-                <a:solidFill>
-                  <a:srgbClr val="475569"/>
-                </a:solidFill>
-                <a:latin typeface="Calibri" pitchFamily="34" charset="0"/>
-                <a:ea typeface="Calibri" pitchFamily="34" charset="-122"/>
-                <a:cs typeface="Calibri" pitchFamily="34" charset="-120"/>
-              </a:rPr>
-              <a:t>No manual form filling."</a:t>
+              <a:t>"Incident INC already created automatically — severity, description, AI diagnosis populated. No manual form filling."</a:t>
             </a:r>
             <a:endParaRPr lang="en-US" sz="950" dirty="0"/>
           </a:p>
@@ -9971,7 +10521,7 @@
         <p:spPr>
           <a:xfrm>
             <a:off x="365760" y="4434840"/>
-            <a:ext cx="1188720" cy="320040"/>
+            <a:ext cx="1188720" cy="347472"/>
           </a:xfrm>
           <a:prstGeom prst="rect">
             <a:avLst/>
@@ -10009,8 +10559,8 @@
         </p:nvSpPr>
         <p:spPr>
           <a:xfrm>
-            <a:off x="365760" y="4754880"/>
-            <a:ext cx="1188720" cy="274320"/>
+            <a:off x="365760" y="4764024"/>
+            <a:ext cx="1188720" cy="256032"/>
           </a:xfrm>
           <a:prstGeom prst="rect">
             <a:avLst/>
@@ -10112,24 +10662,7 @@
                 <a:ea typeface="Calibri" pitchFamily="34" charset="-122"/>
                 <a:cs typeface="Calibri" pitchFamily="34" charset="-120"/>
               </a:rPr>
-              <a:t>Click 'Apply Fix'. Show before/after metrics appear:</a:t>
-            </a:r>
-            <a:endParaRPr lang="en-US" sz="950" dirty="0"/>
-          </a:p>
-          <a:p>
-            <a:pPr indent="0" marL="0">
-              <a:buNone/>
-            </a:pPr>
-            <a:r>
-              <a:rPr lang="en-US" sz="950" dirty="0">
-                <a:solidFill>
-                  <a:srgbClr val="475569"/>
-                </a:solidFill>
-                <a:latin typeface="Calibri" pitchFamily="34" charset="0"/>
-                <a:ea typeface="Calibri" pitchFamily="34" charset="-122"/>
-                <a:cs typeface="Calibri" pitchFamily="34" charset="-120"/>
-              </a:rPr>
-              <a:t>Memory: 512Mi→2Gi, Restarts: 19→0, Status: CrashLoopBackOff→Running.</a:t>
+              <a:t>Click 'Apply Fix'. Show before/after: Memory 512Mi→2Gi, Restarts 19→0, Status→Running.</a:t>
             </a:r>
             <a:endParaRPr lang="en-US" sz="950" dirty="0"/>
           </a:p>
@@ -10183,7 +10716,7 @@
         <p:spPr>
           <a:xfrm>
             <a:off x="365760" y="5148072"/>
-            <a:ext cx="1188720" cy="320040"/>
+            <a:ext cx="1188720" cy="347472"/>
           </a:xfrm>
           <a:prstGeom prst="rect">
             <a:avLst/>
@@ -10221,8 +10754,8 @@
         </p:nvSpPr>
         <p:spPr>
           <a:xfrm>
-            <a:off x="365760" y="5468112"/>
-            <a:ext cx="1188720" cy="274320"/>
+            <a:off x="365760" y="5477256"/>
+            <a:ext cx="1188720" cy="256032"/>
           </a:xfrm>
           <a:prstGeom prst="rect">
             <a:avLst/>
@@ -10324,7 +10857,7 @@
                 <a:ea typeface="Calibri" pitchFamily="34" charset="-122"/>
                 <a:cs typeface="Calibri" pitchFamily="34" charset="-120"/>
               </a:rPr>
-              <a:t>Point to incident timeline: Detection→Diagnosis→Fix→Validated→Resolved.</a:t>
+              <a:t>Point to timeline: Detection→Diagnosis→Fix→Validated→Resolved.</a:t>
             </a:r>
             <a:endParaRPr lang="en-US" sz="950" dirty="0"/>
           </a:p>
@@ -10378,7 +10911,7 @@
         <p:spPr>
           <a:xfrm>
             <a:off x="365760" y="5861304"/>
-            <a:ext cx="1188720" cy="320040"/>
+            <a:ext cx="1188720" cy="347472"/>
           </a:xfrm>
           <a:prstGeom prst="rect">
             <a:avLst/>
@@ -10416,8 +10949,8 @@
         </p:nvSpPr>
         <p:spPr>
           <a:xfrm>
-            <a:off x="365760" y="6181344"/>
-            <a:ext cx="1188720" cy="274320"/>
+            <a:off x="365760" y="6190488"/>
+            <a:ext cx="1188720" cy="256032"/>
           </a:xfrm>
           <a:prstGeom prst="rect">
             <a:avLst/>
@@ -10519,24 +11052,7 @@
                 <a:ea typeface="Calibri" pitchFamily="34" charset="-122"/>
                 <a:cs typeface="Calibri" pitchFamily="34" charset="-120"/>
               </a:rPr>
-              <a:t>"From question to resolution in 45 seconds. 20 steps, only 3 need human input.</a:t>
-            </a:r>
-            <a:endParaRPr lang="en-US" sz="950" dirty="0"/>
-          </a:p>
-          <a:p>
-            <a:pPr indent="0" marL="0">
-              <a:buNone/>
-            </a:pPr>
-            <a:r>
-              <a:rPr lang="en-US" sz="950" dirty="0">
-                <a:solidFill>
-                  <a:srgbClr val="475569"/>
-                </a:solidFill>
-                <a:latin typeface="Calibri" pitchFamily="34" charset="0"/>
-                <a:ea typeface="Calibri" pitchFamily="34" charset="-122"/>
-                <a:cs typeface="Calibri" pitchFamily="34" charset="-120"/>
-              </a:rPr>
-              <a:t>Full ITSM lifecycle. Production-grade evidence. That's TCS Agentic AI."</a:t>
+              <a:t>"From question to resolution in 45 seconds. 20 steps, only 3 need human input. Full ITSM lifecycle. That's TCS Agentic AI."</a:t>
             </a:r>
             <a:endParaRPr lang="en-US" sz="950" dirty="0"/>
           </a:p>
@@ -10597,7 +11113,7 @@
                 <a:ea typeface="Calibri" pitchFamily="34" charset="-122"/>
                 <a:cs typeface="Calibri" pitchFamily="34" charset="-120"/>
               </a:rPr>
-              <a:t>PRO TIP:  Pause briefly after the AI diagnosis appears — let the audience absorb the speed.  End with the MTTR number for maximum impact.</a:t>
+              <a:t>PRO TIP:  Pause after AI diagnosis — let the audience absorb the speed.  End with MTTR for maximum impact.</a:t>
             </a:r>
             <a:endParaRPr lang="en-US" sz="900" dirty="0"/>
           </a:p>
@@ -10832,7 +11348,7 @@
                 <a:ea typeface="Calibri" pitchFamily="34" charset="-122"/>
                 <a:cs typeface="Calibri" pitchFamily="34" charset="-120"/>
               </a:rPr>
-              <a:t>2-4 hours → 45 seconds</a:t>
+              <a:t>2–4 hours → 45 seconds</a:t>
             </a:r>
             <a:endParaRPr lang="en-US" sz="1100" dirty="0"/>
           </a:p>
@@ -11731,7 +12247,7 @@
         <p:spPr>
           <a:xfrm>
             <a:off x="0" y="0"/>
-            <a:ext cx="12188952" cy="54864"/>
+            <a:ext cx="12188952" cy="73152"/>
           </a:xfrm>
           <a:prstGeom prst="rect">
             <a:avLst/>
